--- a/ML_PROJECT_PPT.pptx
+++ b/ML_PROJECT_PPT.pptx
@@ -5,7 +5,7 @@
     <p:sldMasterId id="2147483648" r:id="rId1"/>
   </p:sldMasterIdLst>
   <p:notesMasterIdLst>
-    <p:notesMasterId r:id="rId18"/>
+    <p:notesMasterId r:id="rId27"/>
   </p:notesMasterIdLst>
   <p:sldIdLst>
     <p:sldId id="283" r:id="rId2"/>
@@ -18,12 +18,21 @@
     <p:sldId id="262" r:id="rId9"/>
     <p:sldId id="290" r:id="rId10"/>
     <p:sldId id="291" r:id="rId11"/>
-    <p:sldId id="286" r:id="rId12"/>
-    <p:sldId id="287" r:id="rId13"/>
-    <p:sldId id="280" r:id="rId14"/>
-    <p:sldId id="288" r:id="rId15"/>
-    <p:sldId id="289" r:id="rId16"/>
-    <p:sldId id="276" r:id="rId17"/>
+    <p:sldId id="293" r:id="rId12"/>
+    <p:sldId id="294" r:id="rId13"/>
+    <p:sldId id="295" r:id="rId14"/>
+    <p:sldId id="296" r:id="rId15"/>
+    <p:sldId id="301" r:id="rId16"/>
+    <p:sldId id="297" r:id="rId17"/>
+    <p:sldId id="298" r:id="rId18"/>
+    <p:sldId id="286" r:id="rId19"/>
+    <p:sldId id="287" r:id="rId20"/>
+    <p:sldId id="280" r:id="rId21"/>
+    <p:sldId id="288" r:id="rId22"/>
+    <p:sldId id="289" r:id="rId23"/>
+    <p:sldId id="299" r:id="rId24"/>
+    <p:sldId id="300" r:id="rId25"/>
+    <p:sldId id="276" r:id="rId26"/>
   </p:sldIdLst>
   <p:sldSz cx="12192000" cy="6858000"/>
   <p:notesSz cx="6858000" cy="9144000"/>
@@ -261,7 +270,7 @@
       <p15:sldGuideLst xmlns:p15="http://schemas.microsoft.com/office/powerpoint/2012/main"/>
     </p:ext>
     <p:ext uri="GoogleSlidesCustomDataVersion2">
-      <go:slidesCustomData xmlns="" xmlns:go="http://customooxmlschemas.google.com/" xmlns:ahyp="http://schemas.microsoft.com/office/drawing/2018/hyperlinkcolor" xmlns:p15="http://schemas.microsoft.com/office/powerpoint/2012/main" xmlns:p14="http://schemas.microsoft.com/office/powerpoint/2010/main" xmlns:com="http://schemas.openxmlformats.org/drawingml/2006/compatibility" xmlns:pvml="urn:schemas-microsoft-com:office:powerpoint" xmlns:v="urn:schemas-microsoft-com:vml" xmlns:o="urn:schemas-microsoft-com:office:office" xmlns:dgm="http://schemas.openxmlformats.org/drawingml/2006/diagram" xmlns:c="http://schemas.openxmlformats.org/drawingml/2006/chart" xmlns:mv="urn:schemas-microsoft-com:mac:vml" xmlns:mc="http://schemas.openxmlformats.org/markup-compatibility/2006" r:id="rId27" roundtripDataSignature="AMtx7mjt3491jQ7aCoyIz2WXeHKroE7tpQ=="/>
+      <go:slidesCustomData xmlns:mc="http://schemas.openxmlformats.org/markup-compatibility/2006" xmlns:mv="urn:schemas-microsoft-com:mac:vml" xmlns:c="http://schemas.openxmlformats.org/drawingml/2006/chart" xmlns:dgm="http://schemas.openxmlformats.org/drawingml/2006/diagram" xmlns:o="urn:schemas-microsoft-com:office:office" xmlns:v="urn:schemas-microsoft-com:vml" xmlns:pvml="urn:schemas-microsoft-com:office:powerpoint" xmlns:com="http://schemas.openxmlformats.org/drawingml/2006/compatibility" xmlns:p14="http://schemas.microsoft.com/office/powerpoint/2010/main" xmlns:p15="http://schemas.microsoft.com/office/powerpoint/2012/main" xmlns:ahyp="http://schemas.microsoft.com/office/drawing/2018/hyperlinkcolor" xmlns:go="http://customooxmlschemas.google.com/" xmlns="" r:id="rId28" roundtripDataSignature="AMtx7mjt3491jQ7aCoyIz2WXeHKroE7tpQ=="/>
     </p:ext>
   </p:extLst>
 </p:presentation>
@@ -11821,7 +11830,7 @@
           <a:lstStyle/>
           <a:p>
             <a:r>
-              <a:rPr lang="en-US" sz="2400" b="1" i="0" u="none" strike="noStrike" baseline="0">
+              <a:rPr lang="en-US" sz="2400" b="1" i="0" u="none" strike="noStrike" baseline="0" dirty="0">
                 <a:solidFill>
                   <a:srgbClr val="000000"/>
                 </a:solidFill>
@@ -11829,11 +11838,11 @@
               </a:rPr>
               <a:t>Testing Screenshot:</a:t>
             </a:r>
-            <a:endParaRPr lang="en-US"/>
+            <a:endParaRPr lang="en-US" dirty="0"/>
           </a:p>
           <a:p>
             <a:pPr algn="ctr"/>
-            <a:endParaRPr lang="en-US"/>
+            <a:endParaRPr lang="en-US" dirty="0"/>
           </a:p>
         </p:txBody>
       </p:sp>
@@ -11882,6 +11891,851 @@
 </file>
 
 <file path=ppt/slides/slide11.xml><?xml version="1.0" encoding="utf-8"?>
+<p:sld xmlns:a="http://schemas.openxmlformats.org/drawingml/2006/main" xmlns:r="http://schemas.openxmlformats.org/officeDocument/2006/relationships" xmlns:p="http://schemas.openxmlformats.org/presentationml/2006/main">
+  <p:cSld>
+    <p:spTree>
+      <p:nvGrpSpPr>
+        <p:cNvPr id="1" name=""/>
+        <p:cNvGrpSpPr/>
+        <p:nvPr/>
+      </p:nvGrpSpPr>
+      <p:grpSpPr>
+        <a:xfrm>
+          <a:off x="0" y="0"/>
+          <a:ext cx="0" cy="0"/>
+          <a:chOff x="0" y="0"/>
+          <a:chExt cx="0" cy="0"/>
+        </a:xfrm>
+      </p:grpSpPr>
+      <p:sp>
+        <p:nvSpPr>
+          <p:cNvPr id="3" name="TextBox 2">
+            <a:extLst>
+              <a:ext uri="{FF2B5EF4-FFF2-40B4-BE49-F238E27FC236}">
+                <a16:creationId xmlns:a16="http://schemas.microsoft.com/office/drawing/2014/main" id="{0A600DCD-F486-0709-790D-2E59FF874A4B}"/>
+              </a:ext>
+            </a:extLst>
+          </p:cNvPr>
+          <p:cNvSpPr txBox="1"/>
+          <p:nvPr/>
+        </p:nvSpPr>
+        <p:spPr>
+          <a:xfrm>
+            <a:off x="557634" y="493067"/>
+            <a:ext cx="2816507" cy="461665"/>
+          </a:xfrm>
+          <a:prstGeom prst="rect">
+            <a:avLst/>
+          </a:prstGeom>
+          <a:noFill/>
+        </p:spPr>
+        <p:txBody>
+          <a:bodyPr rot="0" spcFirstLastPara="0" vertOverflow="overflow" horzOverflow="overflow" vert="horz" wrap="square" lIns="91440" tIns="45720" rIns="91440" bIns="45720" numCol="1" spcCol="0" rtlCol="0" fromWordArt="0" anchor="t" anchorCtr="0" forceAA="0" compatLnSpc="1">
+            <a:prstTxWarp prst="textNoShape">
+              <a:avLst/>
+            </a:prstTxWarp>
+            <a:spAutoFit/>
+          </a:bodyPr>
+          <a:lstStyle/>
+          <a:p>
+            <a:r>
+              <a:rPr lang="en-US" sz="2400" b="1" dirty="0">
+                <a:latin typeface="Calibri"/>
+              </a:rPr>
+              <a:t>DEPLOYMENT:</a:t>
+            </a:r>
+            <a:endParaRPr lang="en-US" dirty="0"/>
+          </a:p>
+        </p:txBody>
+      </p:sp>
+      <p:pic>
+        <p:nvPicPr>
+          <p:cNvPr id="5" name="Picture 4">
+            <a:extLst>
+              <a:ext uri="{FF2B5EF4-FFF2-40B4-BE49-F238E27FC236}">
+                <a16:creationId xmlns:a16="http://schemas.microsoft.com/office/drawing/2014/main" id="{F8C956C7-152C-85D9-879E-57D4EAE87130}"/>
+              </a:ext>
+            </a:extLst>
+          </p:cNvPr>
+          <p:cNvPicPr>
+            <a:picLocks noChangeAspect="1"/>
+          </p:cNvPicPr>
+          <p:nvPr/>
+        </p:nvPicPr>
+        <p:blipFill>
+          <a:blip r:embed="rId2"/>
+          <a:srcRect t="7149" b="7149"/>
+          <a:stretch/>
+        </p:blipFill>
+        <p:spPr>
+          <a:xfrm>
+            <a:off x="1190625" y="1600882"/>
+            <a:ext cx="9403625" cy="4533218"/>
+          </a:xfrm>
+          <a:prstGeom prst="rect">
+            <a:avLst/>
+          </a:prstGeom>
+        </p:spPr>
+      </p:pic>
+      <p:sp>
+        <p:nvSpPr>
+          <p:cNvPr id="6" name="TextBox 5">
+            <a:extLst>
+              <a:ext uri="{FF2B5EF4-FFF2-40B4-BE49-F238E27FC236}">
+                <a16:creationId xmlns:a16="http://schemas.microsoft.com/office/drawing/2014/main" id="{48333FF5-B662-45ED-E23C-C6A50DE344FA}"/>
+              </a:ext>
+            </a:extLst>
+          </p:cNvPr>
+          <p:cNvSpPr txBox="1"/>
+          <p:nvPr/>
+        </p:nvSpPr>
+        <p:spPr>
+          <a:xfrm>
+            <a:off x="1190625" y="1143000"/>
+            <a:ext cx="8258175" cy="307777"/>
+          </a:xfrm>
+          <a:prstGeom prst="rect">
+            <a:avLst/>
+          </a:prstGeom>
+          <a:noFill/>
+        </p:spPr>
+        <p:txBody>
+          <a:bodyPr wrap="square" rtlCol="0">
+            <a:spAutoFit/>
+          </a:bodyPr>
+          <a:lstStyle/>
+          <a:p>
+            <a:r>
+              <a:rPr lang="en-US" dirty="0"/>
+              <a:t>LINK : </a:t>
+            </a:r>
+            <a:r>
+              <a:rPr lang="en-US" dirty="0">
+                <a:hlinkClick r:id="rId3"/>
+              </a:rPr>
+              <a:t> https://ibm-ml-project.onrender.com/</a:t>
+            </a:r>
+            <a:endParaRPr lang="en-IN" dirty="0"/>
+          </a:p>
+        </p:txBody>
+      </p:sp>
+    </p:spTree>
+    <p:extLst>
+      <p:ext uri="{BB962C8B-B14F-4D97-AF65-F5344CB8AC3E}">
+        <p14:creationId xmlns:p14="http://schemas.microsoft.com/office/powerpoint/2010/main" val="1704022929"/>
+      </p:ext>
+    </p:extLst>
+  </p:cSld>
+  <p:clrMapOvr>
+    <a:masterClrMapping/>
+  </p:clrMapOvr>
+</p:sld>
+</file>
+
+<file path=ppt/slides/slide12.xml><?xml version="1.0" encoding="utf-8"?>
+<p:sld xmlns:a="http://schemas.openxmlformats.org/drawingml/2006/main" xmlns:r="http://schemas.openxmlformats.org/officeDocument/2006/relationships" xmlns:p="http://schemas.openxmlformats.org/presentationml/2006/main">
+  <p:cSld>
+    <p:spTree>
+      <p:nvGrpSpPr>
+        <p:cNvPr id="1" name="">
+          <a:extLst>
+            <a:ext uri="{FF2B5EF4-FFF2-40B4-BE49-F238E27FC236}">
+              <a16:creationId xmlns:a16="http://schemas.microsoft.com/office/drawing/2014/main" id="{E34FD09C-BE6D-BE0E-8A0E-72FEDEB4C7E5}"/>
+            </a:ext>
+          </a:extLst>
+        </p:cNvPr>
+        <p:cNvGrpSpPr/>
+        <p:nvPr/>
+      </p:nvGrpSpPr>
+      <p:grpSpPr>
+        <a:xfrm>
+          <a:off x="0" y="0"/>
+          <a:ext cx="0" cy="0"/>
+          <a:chOff x="0" y="0"/>
+          <a:chExt cx="0" cy="0"/>
+        </a:xfrm>
+      </p:grpSpPr>
+      <p:sp>
+        <p:nvSpPr>
+          <p:cNvPr id="3" name="TextBox 2">
+            <a:extLst>
+              <a:ext uri="{FF2B5EF4-FFF2-40B4-BE49-F238E27FC236}">
+                <a16:creationId xmlns:a16="http://schemas.microsoft.com/office/drawing/2014/main" id="{D750ADF0-3B47-F62D-B6F1-82EAC28F7C4B}"/>
+              </a:ext>
+            </a:extLst>
+          </p:cNvPr>
+          <p:cNvSpPr txBox="1"/>
+          <p:nvPr/>
+        </p:nvSpPr>
+        <p:spPr>
+          <a:xfrm>
+            <a:off x="557634" y="493067"/>
+            <a:ext cx="5662191" cy="461665"/>
+          </a:xfrm>
+          <a:prstGeom prst="rect">
+            <a:avLst/>
+          </a:prstGeom>
+          <a:noFill/>
+        </p:spPr>
+        <p:txBody>
+          <a:bodyPr rot="0" spcFirstLastPara="0" vertOverflow="overflow" horzOverflow="overflow" vert="horz" wrap="square" lIns="91440" tIns="45720" rIns="91440" bIns="45720" numCol="1" spcCol="0" rtlCol="0" fromWordArt="0" anchor="t" anchorCtr="0" forceAA="0" compatLnSpc="1">
+            <a:prstTxWarp prst="textNoShape">
+              <a:avLst/>
+            </a:prstTxWarp>
+            <a:spAutoFit/>
+          </a:bodyPr>
+          <a:lstStyle/>
+          <a:p>
+            <a:r>
+              <a:rPr lang="en-US" sz="2400" b="1" dirty="0">
+                <a:latin typeface="Calibri"/>
+              </a:rPr>
+              <a:t>AFTER DEPLOYMENT OUTPUT &amp; PROMPT:</a:t>
+            </a:r>
+            <a:endParaRPr lang="en-US" dirty="0"/>
+          </a:p>
+        </p:txBody>
+      </p:sp>
+      <p:pic>
+        <p:nvPicPr>
+          <p:cNvPr id="5" name="Picture 4">
+            <a:extLst>
+              <a:ext uri="{FF2B5EF4-FFF2-40B4-BE49-F238E27FC236}">
+                <a16:creationId xmlns:a16="http://schemas.microsoft.com/office/drawing/2014/main" id="{405B2899-3299-B255-B603-146D33B2C0B2}"/>
+              </a:ext>
+            </a:extLst>
+          </p:cNvPr>
+          <p:cNvPicPr>
+            <a:picLocks noChangeAspect="1"/>
+          </p:cNvPicPr>
+          <p:nvPr/>
+        </p:nvPicPr>
+        <p:blipFill>
+          <a:blip r:embed="rId2"/>
+          <a:srcRect t="7149" b="7149"/>
+          <a:stretch/>
+        </p:blipFill>
+        <p:spPr>
+          <a:xfrm>
+            <a:off x="1394187" y="1372282"/>
+            <a:ext cx="9403625" cy="4533218"/>
+          </a:xfrm>
+          <a:prstGeom prst="rect">
+            <a:avLst/>
+          </a:prstGeom>
+        </p:spPr>
+      </p:pic>
+    </p:spTree>
+    <p:extLst>
+      <p:ext uri="{BB962C8B-B14F-4D97-AF65-F5344CB8AC3E}">
+        <p14:creationId xmlns:p14="http://schemas.microsoft.com/office/powerpoint/2010/main" val="2782082654"/>
+      </p:ext>
+    </p:extLst>
+  </p:cSld>
+  <p:clrMapOvr>
+    <a:masterClrMapping/>
+  </p:clrMapOvr>
+</p:sld>
+</file>
+
+<file path=ppt/slides/slide13.xml><?xml version="1.0" encoding="utf-8"?>
+<p:sld xmlns:a="http://schemas.openxmlformats.org/drawingml/2006/main" xmlns:r="http://schemas.openxmlformats.org/officeDocument/2006/relationships" xmlns:p="http://schemas.openxmlformats.org/presentationml/2006/main">
+  <p:cSld>
+    <p:spTree>
+      <p:nvGrpSpPr>
+        <p:cNvPr id="1" name="">
+          <a:extLst>
+            <a:ext uri="{FF2B5EF4-FFF2-40B4-BE49-F238E27FC236}">
+              <a16:creationId xmlns:a16="http://schemas.microsoft.com/office/drawing/2014/main" id="{C0E503F8-D42A-4E35-14A5-D482E183487E}"/>
+            </a:ext>
+          </a:extLst>
+        </p:cNvPr>
+        <p:cNvGrpSpPr/>
+        <p:nvPr/>
+      </p:nvGrpSpPr>
+      <p:grpSpPr>
+        <a:xfrm>
+          <a:off x="0" y="0"/>
+          <a:ext cx="0" cy="0"/>
+          <a:chOff x="0" y="0"/>
+          <a:chExt cx="0" cy="0"/>
+        </a:xfrm>
+      </p:grpSpPr>
+      <p:sp>
+        <p:nvSpPr>
+          <p:cNvPr id="3" name="TextBox 2">
+            <a:extLst>
+              <a:ext uri="{FF2B5EF4-FFF2-40B4-BE49-F238E27FC236}">
+                <a16:creationId xmlns:a16="http://schemas.microsoft.com/office/drawing/2014/main" id="{269AC4F5-E69E-347E-28C9-1066592D7D36}"/>
+              </a:ext>
+            </a:extLst>
+          </p:cNvPr>
+          <p:cNvSpPr txBox="1"/>
+          <p:nvPr/>
+        </p:nvSpPr>
+        <p:spPr>
+          <a:xfrm>
+            <a:off x="557634" y="493067"/>
+            <a:ext cx="5662191" cy="461665"/>
+          </a:xfrm>
+          <a:prstGeom prst="rect">
+            <a:avLst/>
+          </a:prstGeom>
+          <a:noFill/>
+        </p:spPr>
+        <p:txBody>
+          <a:bodyPr rot="0" spcFirstLastPara="0" vertOverflow="overflow" horzOverflow="overflow" vert="horz" wrap="square" lIns="91440" tIns="45720" rIns="91440" bIns="45720" numCol="1" spcCol="0" rtlCol="0" fromWordArt="0" anchor="t" anchorCtr="0" forceAA="0" compatLnSpc="1">
+            <a:prstTxWarp prst="textNoShape">
+              <a:avLst/>
+            </a:prstTxWarp>
+            <a:spAutoFit/>
+          </a:bodyPr>
+          <a:lstStyle/>
+          <a:p>
+            <a:r>
+              <a:rPr lang="en-US" sz="2400" b="1" dirty="0">
+                <a:latin typeface="Calibri"/>
+              </a:rPr>
+              <a:t>AFTER DEPLOYMENT OUTPUT &amp; PROMPT:</a:t>
+            </a:r>
+            <a:endParaRPr lang="en-US" dirty="0"/>
+          </a:p>
+        </p:txBody>
+      </p:sp>
+      <p:pic>
+        <p:nvPicPr>
+          <p:cNvPr id="5" name="Picture 4">
+            <a:extLst>
+              <a:ext uri="{FF2B5EF4-FFF2-40B4-BE49-F238E27FC236}">
+                <a16:creationId xmlns:a16="http://schemas.microsoft.com/office/drawing/2014/main" id="{A75F854A-22E0-A624-5C47-94AA3F6446D1}"/>
+              </a:ext>
+            </a:extLst>
+          </p:cNvPr>
+          <p:cNvPicPr>
+            <a:picLocks noChangeAspect="1"/>
+          </p:cNvPicPr>
+          <p:nvPr/>
+        </p:nvPicPr>
+        <p:blipFill>
+          <a:blip r:embed="rId2"/>
+          <a:srcRect t="7149" b="7149"/>
+          <a:stretch/>
+        </p:blipFill>
+        <p:spPr>
+          <a:xfrm>
+            <a:off x="1394187" y="1372282"/>
+            <a:ext cx="9403625" cy="4533218"/>
+          </a:xfrm>
+          <a:prstGeom prst="rect">
+            <a:avLst/>
+          </a:prstGeom>
+        </p:spPr>
+      </p:pic>
+    </p:spTree>
+    <p:extLst>
+      <p:ext uri="{BB962C8B-B14F-4D97-AF65-F5344CB8AC3E}">
+        <p14:creationId xmlns:p14="http://schemas.microsoft.com/office/powerpoint/2010/main" val="1074700775"/>
+      </p:ext>
+    </p:extLst>
+  </p:cSld>
+  <p:clrMapOvr>
+    <a:masterClrMapping/>
+  </p:clrMapOvr>
+</p:sld>
+</file>
+
+<file path=ppt/slides/slide14.xml><?xml version="1.0" encoding="utf-8"?>
+<p:sld xmlns:a="http://schemas.openxmlformats.org/drawingml/2006/main" xmlns:r="http://schemas.openxmlformats.org/officeDocument/2006/relationships" xmlns:p="http://schemas.openxmlformats.org/presentationml/2006/main">
+  <p:cSld>
+    <p:spTree>
+      <p:nvGrpSpPr>
+        <p:cNvPr id="1" name="">
+          <a:extLst>
+            <a:ext uri="{FF2B5EF4-FFF2-40B4-BE49-F238E27FC236}">
+              <a16:creationId xmlns:a16="http://schemas.microsoft.com/office/drawing/2014/main" id="{160E1442-142A-1F67-13C7-76F891C2DD90}"/>
+            </a:ext>
+          </a:extLst>
+        </p:cNvPr>
+        <p:cNvGrpSpPr/>
+        <p:nvPr/>
+      </p:nvGrpSpPr>
+      <p:grpSpPr>
+        <a:xfrm>
+          <a:off x="0" y="0"/>
+          <a:ext cx="0" cy="0"/>
+          <a:chOff x="0" y="0"/>
+          <a:chExt cx="0" cy="0"/>
+        </a:xfrm>
+      </p:grpSpPr>
+      <p:sp>
+        <p:nvSpPr>
+          <p:cNvPr id="3" name="TextBox 2">
+            <a:extLst>
+              <a:ext uri="{FF2B5EF4-FFF2-40B4-BE49-F238E27FC236}">
+                <a16:creationId xmlns:a16="http://schemas.microsoft.com/office/drawing/2014/main" id="{61CE782C-300E-6CD5-7D04-92F2A8810816}"/>
+              </a:ext>
+            </a:extLst>
+          </p:cNvPr>
+          <p:cNvSpPr txBox="1"/>
+          <p:nvPr/>
+        </p:nvSpPr>
+        <p:spPr>
+          <a:xfrm>
+            <a:off x="557634" y="493067"/>
+            <a:ext cx="5662191" cy="461665"/>
+          </a:xfrm>
+          <a:prstGeom prst="rect">
+            <a:avLst/>
+          </a:prstGeom>
+          <a:noFill/>
+        </p:spPr>
+        <p:txBody>
+          <a:bodyPr rot="0" spcFirstLastPara="0" vertOverflow="overflow" horzOverflow="overflow" vert="horz" wrap="square" lIns="91440" tIns="45720" rIns="91440" bIns="45720" numCol="1" spcCol="0" rtlCol="0" fromWordArt="0" anchor="t" anchorCtr="0" forceAA="0" compatLnSpc="1">
+            <a:prstTxWarp prst="textNoShape">
+              <a:avLst/>
+            </a:prstTxWarp>
+            <a:spAutoFit/>
+          </a:bodyPr>
+          <a:lstStyle/>
+          <a:p>
+            <a:r>
+              <a:rPr lang="en-US" sz="2400" b="1" dirty="0">
+                <a:latin typeface="Calibri"/>
+              </a:rPr>
+              <a:t>AFTER DEPLOYMENT OUTPUT &amp; PROMPT:</a:t>
+            </a:r>
+            <a:endParaRPr lang="en-US" dirty="0"/>
+          </a:p>
+        </p:txBody>
+      </p:sp>
+      <p:pic>
+        <p:nvPicPr>
+          <p:cNvPr id="5" name="Picture 4">
+            <a:extLst>
+              <a:ext uri="{FF2B5EF4-FFF2-40B4-BE49-F238E27FC236}">
+                <a16:creationId xmlns:a16="http://schemas.microsoft.com/office/drawing/2014/main" id="{87DA8EF8-B452-C850-5B3F-350C4D1D9035}"/>
+              </a:ext>
+            </a:extLst>
+          </p:cNvPr>
+          <p:cNvPicPr>
+            <a:picLocks noChangeAspect="1"/>
+          </p:cNvPicPr>
+          <p:nvPr/>
+        </p:nvPicPr>
+        <p:blipFill>
+          <a:blip r:embed="rId2"/>
+          <a:srcRect t="7149" b="7149"/>
+          <a:stretch/>
+        </p:blipFill>
+        <p:spPr>
+          <a:xfrm>
+            <a:off x="1394187" y="1372282"/>
+            <a:ext cx="9403625" cy="4533218"/>
+          </a:xfrm>
+          <a:prstGeom prst="rect">
+            <a:avLst/>
+          </a:prstGeom>
+        </p:spPr>
+      </p:pic>
+    </p:spTree>
+    <p:extLst>
+      <p:ext uri="{BB962C8B-B14F-4D97-AF65-F5344CB8AC3E}">
+        <p14:creationId xmlns:p14="http://schemas.microsoft.com/office/powerpoint/2010/main" val="3026509811"/>
+      </p:ext>
+    </p:extLst>
+  </p:cSld>
+  <p:clrMapOvr>
+    <a:masterClrMapping/>
+  </p:clrMapOvr>
+</p:sld>
+</file>
+
+<file path=ppt/slides/slide15.xml><?xml version="1.0" encoding="utf-8"?>
+<p:sld xmlns:a="http://schemas.openxmlformats.org/drawingml/2006/main" xmlns:r="http://schemas.openxmlformats.org/officeDocument/2006/relationships" xmlns:p="http://schemas.openxmlformats.org/presentationml/2006/main">
+  <p:cSld>
+    <p:spTree>
+      <p:nvGrpSpPr>
+        <p:cNvPr id="1" name="">
+          <a:extLst>
+            <a:ext uri="{FF2B5EF4-FFF2-40B4-BE49-F238E27FC236}">
+              <a16:creationId xmlns:a16="http://schemas.microsoft.com/office/drawing/2014/main" id="{705A4D6E-5F60-A982-7C9A-166128795D6E}"/>
+            </a:ext>
+          </a:extLst>
+        </p:cNvPr>
+        <p:cNvGrpSpPr/>
+        <p:nvPr/>
+      </p:nvGrpSpPr>
+      <p:grpSpPr>
+        <a:xfrm>
+          <a:off x="0" y="0"/>
+          <a:ext cx="0" cy="0"/>
+          <a:chOff x="0" y="0"/>
+          <a:chExt cx="0" cy="0"/>
+        </a:xfrm>
+      </p:grpSpPr>
+      <p:sp>
+        <p:nvSpPr>
+          <p:cNvPr id="3" name="TextBox 2">
+            <a:extLst>
+              <a:ext uri="{FF2B5EF4-FFF2-40B4-BE49-F238E27FC236}">
+                <a16:creationId xmlns:a16="http://schemas.microsoft.com/office/drawing/2014/main" id="{FE43B7B7-A27E-BC57-C706-0B7600635D76}"/>
+              </a:ext>
+            </a:extLst>
+          </p:cNvPr>
+          <p:cNvSpPr txBox="1"/>
+          <p:nvPr/>
+        </p:nvSpPr>
+        <p:spPr>
+          <a:xfrm>
+            <a:off x="557634" y="493067"/>
+            <a:ext cx="5662191" cy="461665"/>
+          </a:xfrm>
+          <a:prstGeom prst="rect">
+            <a:avLst/>
+          </a:prstGeom>
+          <a:noFill/>
+        </p:spPr>
+        <p:txBody>
+          <a:bodyPr rot="0" spcFirstLastPara="0" vertOverflow="overflow" horzOverflow="overflow" vert="horz" wrap="square" lIns="91440" tIns="45720" rIns="91440" bIns="45720" numCol="1" spcCol="0" rtlCol="0" fromWordArt="0" anchor="t" anchorCtr="0" forceAA="0" compatLnSpc="1">
+            <a:prstTxWarp prst="textNoShape">
+              <a:avLst/>
+            </a:prstTxWarp>
+            <a:spAutoFit/>
+          </a:bodyPr>
+          <a:lstStyle/>
+          <a:p>
+            <a:r>
+              <a:rPr lang="en-US" sz="2400" b="1" dirty="0">
+                <a:latin typeface="Calibri"/>
+              </a:rPr>
+              <a:t>AFTER DEPLOYMENT OUTPUT &amp; PROMPT:</a:t>
+            </a:r>
+            <a:endParaRPr lang="en-US" dirty="0"/>
+          </a:p>
+        </p:txBody>
+      </p:sp>
+      <p:pic>
+        <p:nvPicPr>
+          <p:cNvPr id="4" name="Picture 3">
+            <a:extLst>
+              <a:ext uri="{FF2B5EF4-FFF2-40B4-BE49-F238E27FC236}">
+                <a16:creationId xmlns:a16="http://schemas.microsoft.com/office/drawing/2014/main" id="{ADE76B67-D495-151F-F02C-9DF54C6F4628}"/>
+              </a:ext>
+            </a:extLst>
+          </p:cNvPr>
+          <p:cNvPicPr>
+            <a:picLocks noChangeAspect="1"/>
+          </p:cNvPicPr>
+          <p:nvPr/>
+        </p:nvPicPr>
+        <p:blipFill>
+          <a:blip r:embed="rId2"/>
+          <a:stretch>
+            <a:fillRect/>
+          </a:stretch>
+        </p:blipFill>
+        <p:spPr>
+          <a:xfrm>
+            <a:off x="727633" y="1128712"/>
+            <a:ext cx="2840438" cy="4600576"/>
+          </a:xfrm>
+          <a:prstGeom prst="rect">
+            <a:avLst/>
+          </a:prstGeom>
+        </p:spPr>
+      </p:pic>
+      <p:pic>
+        <p:nvPicPr>
+          <p:cNvPr id="7" name="Picture 6">
+            <a:extLst>
+              <a:ext uri="{FF2B5EF4-FFF2-40B4-BE49-F238E27FC236}">
+                <a16:creationId xmlns:a16="http://schemas.microsoft.com/office/drawing/2014/main" id="{FDB20CAB-63E3-3278-28E1-5E03A6A0E44A}"/>
+              </a:ext>
+            </a:extLst>
+          </p:cNvPr>
+          <p:cNvPicPr>
+            <a:picLocks noChangeAspect="1"/>
+          </p:cNvPicPr>
+          <p:nvPr/>
+        </p:nvPicPr>
+        <p:blipFill>
+          <a:blip r:embed="rId3"/>
+          <a:stretch>
+            <a:fillRect/>
+          </a:stretch>
+        </p:blipFill>
+        <p:spPr>
+          <a:xfrm>
+            <a:off x="8061956" y="2127520"/>
+            <a:ext cx="3200924" cy="2336259"/>
+          </a:xfrm>
+          <a:prstGeom prst="rect">
+            <a:avLst/>
+          </a:prstGeom>
+        </p:spPr>
+      </p:pic>
+      <p:sp>
+        <p:nvSpPr>
+          <p:cNvPr id="8" name="TextBox 7">
+            <a:extLst>
+              <a:ext uri="{FF2B5EF4-FFF2-40B4-BE49-F238E27FC236}">
+                <a16:creationId xmlns:a16="http://schemas.microsoft.com/office/drawing/2014/main" id="{6FFE5B12-C8E8-DD67-DBFA-92F1230C1D0C}"/>
+              </a:ext>
+            </a:extLst>
+          </p:cNvPr>
+          <p:cNvSpPr txBox="1"/>
+          <p:nvPr/>
+        </p:nvSpPr>
+        <p:spPr>
+          <a:xfrm>
+            <a:off x="4514852" y="2794270"/>
+            <a:ext cx="3114675" cy="738664"/>
+          </a:xfrm>
+          <a:prstGeom prst="rect">
+            <a:avLst/>
+          </a:prstGeom>
+          <a:noFill/>
+        </p:spPr>
+        <p:txBody>
+          <a:bodyPr wrap="square" rtlCol="0">
+            <a:spAutoFit/>
+          </a:bodyPr>
+          <a:lstStyle/>
+          <a:p>
+            <a:r>
+              <a:rPr lang="en-US" dirty="0"/>
+              <a:t>Machine type based + sensor readings-based analysis and fault detection</a:t>
+            </a:r>
+            <a:endParaRPr lang="en-IN" dirty="0"/>
+          </a:p>
+        </p:txBody>
+      </p:sp>
+    </p:spTree>
+    <p:extLst>
+      <p:ext uri="{BB962C8B-B14F-4D97-AF65-F5344CB8AC3E}">
+        <p14:creationId xmlns:p14="http://schemas.microsoft.com/office/powerpoint/2010/main" val="2918682426"/>
+      </p:ext>
+    </p:extLst>
+  </p:cSld>
+  <p:clrMapOvr>
+    <a:masterClrMapping/>
+  </p:clrMapOvr>
+</p:sld>
+</file>
+
+<file path=ppt/slides/slide16.xml><?xml version="1.0" encoding="utf-8"?>
+<p:sld xmlns:a="http://schemas.openxmlformats.org/drawingml/2006/main" xmlns:r="http://schemas.openxmlformats.org/officeDocument/2006/relationships" xmlns:p="http://schemas.openxmlformats.org/presentationml/2006/main">
+  <p:cSld>
+    <p:spTree>
+      <p:nvGrpSpPr>
+        <p:cNvPr id="1" name="">
+          <a:extLst>
+            <a:ext uri="{FF2B5EF4-FFF2-40B4-BE49-F238E27FC236}">
+              <a16:creationId xmlns:a16="http://schemas.microsoft.com/office/drawing/2014/main" id="{062D4662-F074-E550-071E-D973E3E2775F}"/>
+            </a:ext>
+          </a:extLst>
+        </p:cNvPr>
+        <p:cNvGrpSpPr/>
+        <p:nvPr/>
+      </p:nvGrpSpPr>
+      <p:grpSpPr>
+        <a:xfrm>
+          <a:off x="0" y="0"/>
+          <a:ext cx="0" cy="0"/>
+          <a:chOff x="0" y="0"/>
+          <a:chExt cx="0" cy="0"/>
+        </a:xfrm>
+      </p:grpSpPr>
+      <p:sp>
+        <p:nvSpPr>
+          <p:cNvPr id="3" name="TextBox 2">
+            <a:extLst>
+              <a:ext uri="{FF2B5EF4-FFF2-40B4-BE49-F238E27FC236}">
+                <a16:creationId xmlns:a16="http://schemas.microsoft.com/office/drawing/2014/main" id="{723B9550-547D-A4BE-2E03-FA4F57138806}"/>
+              </a:ext>
+            </a:extLst>
+          </p:cNvPr>
+          <p:cNvSpPr txBox="1"/>
+          <p:nvPr/>
+        </p:nvSpPr>
+        <p:spPr>
+          <a:xfrm>
+            <a:off x="557634" y="493067"/>
+            <a:ext cx="5662191" cy="461665"/>
+          </a:xfrm>
+          <a:prstGeom prst="rect">
+            <a:avLst/>
+          </a:prstGeom>
+          <a:noFill/>
+        </p:spPr>
+        <p:txBody>
+          <a:bodyPr rot="0" spcFirstLastPara="0" vertOverflow="overflow" horzOverflow="overflow" vert="horz" wrap="square" lIns="91440" tIns="45720" rIns="91440" bIns="45720" numCol="1" spcCol="0" rtlCol="0" fromWordArt="0" anchor="t" anchorCtr="0" forceAA="0" compatLnSpc="1">
+            <a:prstTxWarp prst="textNoShape">
+              <a:avLst/>
+            </a:prstTxWarp>
+            <a:spAutoFit/>
+          </a:bodyPr>
+          <a:lstStyle/>
+          <a:p>
+            <a:r>
+              <a:rPr lang="en-US" sz="2400" b="1" dirty="0">
+                <a:latin typeface="Calibri"/>
+              </a:rPr>
+              <a:t>IBM BOB SCREENSHOTS:</a:t>
+            </a:r>
+            <a:endParaRPr lang="en-US" dirty="0"/>
+          </a:p>
+        </p:txBody>
+      </p:sp>
+      <p:pic>
+        <p:nvPicPr>
+          <p:cNvPr id="5" name="Picture 4">
+            <a:extLst>
+              <a:ext uri="{FF2B5EF4-FFF2-40B4-BE49-F238E27FC236}">
+                <a16:creationId xmlns:a16="http://schemas.microsoft.com/office/drawing/2014/main" id="{EC3E0EDE-814A-E082-23C0-CC5C927D736E}"/>
+              </a:ext>
+            </a:extLst>
+          </p:cNvPr>
+          <p:cNvPicPr>
+            <a:picLocks noChangeAspect="1"/>
+          </p:cNvPicPr>
+          <p:nvPr/>
+        </p:nvPicPr>
+        <p:blipFill>
+          <a:blip r:embed="rId2"/>
+          <a:srcRect t="7149" b="7149"/>
+          <a:stretch/>
+        </p:blipFill>
+        <p:spPr>
+          <a:xfrm>
+            <a:off x="1394187" y="1372282"/>
+            <a:ext cx="9403625" cy="4533218"/>
+          </a:xfrm>
+          <a:prstGeom prst="rect">
+            <a:avLst/>
+          </a:prstGeom>
+        </p:spPr>
+      </p:pic>
+    </p:spTree>
+    <p:extLst>
+      <p:ext uri="{BB962C8B-B14F-4D97-AF65-F5344CB8AC3E}">
+        <p14:creationId xmlns:p14="http://schemas.microsoft.com/office/powerpoint/2010/main" val="3100452601"/>
+      </p:ext>
+    </p:extLst>
+  </p:cSld>
+  <p:clrMapOvr>
+    <a:masterClrMapping/>
+  </p:clrMapOvr>
+</p:sld>
+</file>
+
+<file path=ppt/slides/slide17.xml><?xml version="1.0" encoding="utf-8"?>
+<p:sld xmlns:a="http://schemas.openxmlformats.org/drawingml/2006/main" xmlns:r="http://schemas.openxmlformats.org/officeDocument/2006/relationships" xmlns:p="http://schemas.openxmlformats.org/presentationml/2006/main">
+  <p:cSld>
+    <p:spTree>
+      <p:nvGrpSpPr>
+        <p:cNvPr id="1" name="">
+          <a:extLst>
+            <a:ext uri="{FF2B5EF4-FFF2-40B4-BE49-F238E27FC236}">
+              <a16:creationId xmlns:a16="http://schemas.microsoft.com/office/drawing/2014/main" id="{0AB58451-0DCE-BDF8-736A-D6DCE09DA763}"/>
+            </a:ext>
+          </a:extLst>
+        </p:cNvPr>
+        <p:cNvGrpSpPr/>
+        <p:nvPr/>
+      </p:nvGrpSpPr>
+      <p:grpSpPr>
+        <a:xfrm>
+          <a:off x="0" y="0"/>
+          <a:ext cx="0" cy="0"/>
+          <a:chOff x="0" y="0"/>
+          <a:chExt cx="0" cy="0"/>
+        </a:xfrm>
+      </p:grpSpPr>
+      <p:sp>
+        <p:nvSpPr>
+          <p:cNvPr id="3" name="TextBox 2">
+            <a:extLst>
+              <a:ext uri="{FF2B5EF4-FFF2-40B4-BE49-F238E27FC236}">
+                <a16:creationId xmlns:a16="http://schemas.microsoft.com/office/drawing/2014/main" id="{F7240E89-24E5-679C-BCF3-4E5969D10AE9}"/>
+              </a:ext>
+            </a:extLst>
+          </p:cNvPr>
+          <p:cNvSpPr txBox="1"/>
+          <p:nvPr/>
+        </p:nvSpPr>
+        <p:spPr>
+          <a:xfrm>
+            <a:off x="557634" y="493067"/>
+            <a:ext cx="5662191" cy="461665"/>
+          </a:xfrm>
+          <a:prstGeom prst="rect">
+            <a:avLst/>
+          </a:prstGeom>
+          <a:noFill/>
+        </p:spPr>
+        <p:txBody>
+          <a:bodyPr rot="0" spcFirstLastPara="0" vertOverflow="overflow" horzOverflow="overflow" vert="horz" wrap="square" lIns="91440" tIns="45720" rIns="91440" bIns="45720" numCol="1" spcCol="0" rtlCol="0" fromWordArt="0" anchor="t" anchorCtr="0" forceAA="0" compatLnSpc="1">
+            <a:prstTxWarp prst="textNoShape">
+              <a:avLst/>
+            </a:prstTxWarp>
+            <a:spAutoFit/>
+          </a:bodyPr>
+          <a:lstStyle/>
+          <a:p>
+            <a:r>
+              <a:rPr lang="en-US" sz="2400" b="1" dirty="0">
+                <a:latin typeface="Calibri"/>
+              </a:rPr>
+              <a:t>IBM BOB SCREENSHOTS:</a:t>
+            </a:r>
+            <a:endParaRPr lang="en-US" dirty="0"/>
+          </a:p>
+        </p:txBody>
+      </p:sp>
+      <p:pic>
+        <p:nvPicPr>
+          <p:cNvPr id="5" name="Picture 4">
+            <a:extLst>
+              <a:ext uri="{FF2B5EF4-FFF2-40B4-BE49-F238E27FC236}">
+                <a16:creationId xmlns:a16="http://schemas.microsoft.com/office/drawing/2014/main" id="{E0185314-0E89-56D3-D684-9AE4C404E7CD}"/>
+              </a:ext>
+            </a:extLst>
+          </p:cNvPr>
+          <p:cNvPicPr>
+            <a:picLocks noChangeAspect="1"/>
+          </p:cNvPicPr>
+          <p:nvPr/>
+        </p:nvPicPr>
+        <p:blipFill>
+          <a:blip r:embed="rId2"/>
+          <a:srcRect t="7149" b="7149"/>
+          <a:stretch/>
+        </p:blipFill>
+        <p:spPr>
+          <a:xfrm>
+            <a:off x="1394187" y="1372282"/>
+            <a:ext cx="9403625" cy="4533218"/>
+          </a:xfrm>
+          <a:prstGeom prst="rect">
+            <a:avLst/>
+          </a:prstGeom>
+        </p:spPr>
+      </p:pic>
+    </p:spTree>
+    <p:extLst>
+      <p:ext uri="{BB962C8B-B14F-4D97-AF65-F5344CB8AC3E}">
+        <p14:creationId xmlns:p14="http://schemas.microsoft.com/office/powerpoint/2010/main" val="1624875289"/>
+      </p:ext>
+    </p:extLst>
+  </p:cSld>
+  <p:clrMapOvr>
+    <a:masterClrMapping/>
+  </p:clrMapOvr>
+</p:sld>
+</file>
+
+<file path=ppt/slides/slide18.xml><?xml version="1.0" encoding="utf-8"?>
 <p:sld xmlns:a="http://schemas.openxmlformats.org/drawingml/2006/main" xmlns:r="http://schemas.openxmlformats.org/officeDocument/2006/relationships" xmlns:p="http://schemas.openxmlformats.org/presentationml/2006/main">
   <p:cSld>
     <p:spTree>
@@ -11955,7 +12809,7 @@
         <p:spPr>
           <a:xfrm>
             <a:off x="777240" y="1330990"/>
-            <a:ext cx="10769628" cy="4196020"/>
+            <a:ext cx="10769628" cy="4559646"/>
           </a:xfrm>
           <a:prstGeom prst="rect">
             <a:avLst/>
@@ -11976,12 +12830,20 @@
               <a:buChar char="•"/>
             </a:pPr>
             <a:r>
-              <a:rPr lang="en-IN" sz="1800" b="1" dirty="0"/>
-              <a:t>Cloud-Native Scalability:</a:t>
+              <a:rPr lang="en-IN" sz="1600" b="1" dirty="0"/>
+              <a:t>IBM </a:t>
             </a:r>
             <a:r>
-              <a:rPr lang="en-IN" sz="1800" dirty="0"/>
-              <a:t> Leverages the robust infrastructure of IBM Cloud and IBM Watson Studio to handle high-volume, real-time industrial sensor streams seamlessly.</a:t>
+              <a:rPr lang="en-IN" sz="1600" b="1" dirty="0" err="1"/>
+              <a:t>Watsonx</a:t>
+            </a:r>
+            <a:r>
+              <a:rPr lang="en-IN" sz="1600" b="1" dirty="0"/>
+              <a:t> Granite-powered</a:t>
+            </a:r>
+            <a:r>
+              <a:rPr lang="en-IN" sz="1600" dirty="0"/>
+              <a:t> — uses enterprise-grade granite-3-8b-instruct LLM, not a generic chatbot, trained for precise technical reasoning.</a:t>
             </a:r>
           </a:p>
           <a:p>
@@ -11993,12 +12855,20 @@
               <a:buChar char="•"/>
             </a:pPr>
             <a:r>
-              <a:rPr lang="en-IN" sz="1800" b="1" dirty="0"/>
-              <a:t>Multi-Parametric Synthesis:</a:t>
+              <a:rPr lang="en-IN" sz="1600" b="1" dirty="0"/>
+              <a:t>Safety-first by design</a:t>
             </a:r>
             <a:r>
-              <a:rPr lang="en-IN" sz="1800" dirty="0"/>
-              <a:t> Evaluates a diverse array of thermodynamic and mechanical variables simultaneously to detect complex, interconnected fault indicators that single-sensor systems miss.</a:t>
+              <a:rPr lang="en-IN" sz="1600" dirty="0"/>
+              <a:t> — every single response </a:t>
+            </a:r>
+            <a:r>
+              <a:rPr lang="en-IN" sz="1600" i="1" dirty="0"/>
+              <a:t>always</a:t>
+            </a:r>
+            <a:r>
+              <a:rPr lang="en-IN" sz="1600" dirty="0"/>
+              <a:t> includes LOTO, PPE, and zero-energy verification instructions before any repair step, hardcoded via AGENT_INSTRUCTIONS.</a:t>
             </a:r>
           </a:p>
           <a:p>
@@ -12010,12 +12880,12 @@
               <a:buChar char="•"/>
             </a:pPr>
             <a:r>
-              <a:rPr lang="en-IN" sz="1800" b="1" dirty="0"/>
-              <a:t>Granular Precision:</a:t>
+              <a:rPr lang="en-IN" sz="1600" b="1" dirty="0"/>
+              <a:t>Sensor-aware diagnosis</a:t>
             </a:r>
             <a:r>
-              <a:rPr lang="en-IN" sz="1800" dirty="0"/>
-              <a:t> Transitions operational strategy from generic, time-based maintenance intervals to precise, condition-based interventions tailored to actual machine wear.</a:t>
+              <a:rPr lang="en-IN" sz="1600" dirty="0"/>
+              <a:t> — accepts live numeric readings (temperature, vibration, pressure, current) and converts them directly into a structured AI fault analysis.</a:t>
             </a:r>
           </a:p>
           <a:p>
@@ -12027,28 +12897,20 @@
               <a:buChar char="•"/>
             </a:pPr>
             <a:r>
-              <a:rPr lang="en-IN" sz="1800" b="1" dirty="0"/>
-              <a:t>Proactive Defect Mapping:</a:t>
+              <a:rPr lang="en-IN" sz="1600" b="1" dirty="0"/>
+              <a:t>Full repair lifecycle in one reply</a:t>
             </a:r>
             <a:r>
-              <a:rPr lang="en-IN" sz="1800" dirty="0"/>
-              <a:t> Links real-time telemetry directly to specific failure modes, allowing facilities to identify not just </a:t>
+              <a:rPr lang="en-IN" sz="1600" dirty="0"/>
+              <a:t> — diagnoses the fault, gives step-by-step repair instructions, recommends spare parts, </a:t>
             </a:r>
             <a:r>
-              <a:rPr lang="en-IN" sz="1800" i="1" dirty="0"/>
-              <a:t>when</a:t>
+              <a:rPr lang="en-IN" sz="1600" i="1" dirty="0"/>
+              <a:t>and</a:t>
             </a:r>
             <a:r>
-              <a:rPr lang="en-IN" sz="1800" dirty="0"/>
-              <a:t> a breakdown will occur, but </a:t>
-            </a:r>
-            <a:r>
-              <a:rPr lang="en-IN" sz="1800" i="1" dirty="0"/>
-              <a:t>why</a:t>
-            </a:r>
-            <a:r>
-              <a:rPr lang="en-IN" sz="1800" dirty="0"/>
-              <a:t>.</a:t>
+              <a:rPr lang="en-IN" sz="1600" dirty="0"/>
+              <a:t> generates a preventive maintenance schedule, all in a single response.</a:t>
             </a:r>
           </a:p>
           <a:p>
@@ -12060,13 +12922,17 @@
               <a:buChar char="•"/>
             </a:pPr>
             <a:r>
-              <a:rPr lang="en-IN" sz="1800" b="1" dirty="0"/>
-              <a:t>Seamless Workflow Integration:</a:t>
+              <a:rPr lang="en-IN" sz="1600" b="1" dirty="0"/>
+              <a:t>Customisable agent behaviour without touching AI code</a:t>
             </a:r>
             <a:r>
-              <a:rPr lang="en-IN" sz="1800" dirty="0"/>
-              <a:t> Converts raw, multi-sensor data into immediate, actionable predictive insights without disrupting existing factory floor operations.</a:t>
+              <a:rPr lang="en-IN" sz="1600" dirty="0"/>
+              <a:t> — tone, safety rules, repair preferences, and response format are all controlled from one AGENT_INSTRUCTIONS block at the top of app.py, no prompt engineering expertise needed.</a:t>
             </a:r>
+            <a:br>
+              <a:rPr lang="en-IN" sz="1600" dirty="0"/>
+            </a:br>
+            <a:endParaRPr lang="en-IN" sz="2000" dirty="0"/>
           </a:p>
         </p:txBody>
       </p:sp>
@@ -12083,7 +12949,7 @@
 </p:sld>
 </file>
 
-<file path=ppt/slides/slide12.xml><?xml version="1.0" encoding="utf-8"?>
+<file path=ppt/slides/slide19.xml><?xml version="1.0" encoding="utf-8"?>
 <p:sld xmlns:a="http://schemas.openxmlformats.org/drawingml/2006/main" xmlns:r="http://schemas.openxmlformats.org/officeDocument/2006/relationships" xmlns:p="http://schemas.openxmlformats.org/presentationml/2006/main">
   <p:cSld>
     <p:spTree>
@@ -12217,117 +13083,19 @@
             <a:r>
               <a:rPr lang="en-US" sz="1850" b="0" i="0" u="none" strike="noStrike" cap="none" dirty="0">
                 <a:solidFill>
-                  <a:srgbClr val="2B3541"/>
+                  <a:srgbClr val="000000"/>
                 </a:solidFill>
                 <a:latin typeface="Times New Roman"/>
                 <a:ea typeface="Times New Roman"/>
                 <a:cs typeface="Times New Roman"/>
                 <a:sym typeface="Times New Roman"/>
               </a:rPr>
-              <a:t>Please create public </a:t>
-            </a:r>
-            <a:r>
-              <a:rPr lang="en-US" sz="1850" b="0" i="0" u="none" strike="noStrike" cap="none" dirty="0" err="1">
-                <a:solidFill>
-                  <a:srgbClr val="2B3541"/>
-                </a:solidFill>
-                <a:latin typeface="Times New Roman"/>
-                <a:ea typeface="Times New Roman"/>
-                <a:cs typeface="Times New Roman"/>
-                <a:sym typeface="Times New Roman"/>
-              </a:rPr>
-              <a:t>github</a:t>
+              <a:t>GITHUB URL : </a:t>
             </a:r>
             <a:r>
               <a:rPr lang="en-US" sz="1850" b="0" i="0" u="none" strike="noStrike" cap="none" dirty="0">
                 <a:solidFill>
-                  <a:srgbClr val="2B3541"/>
-                </a:solidFill>
-                <a:latin typeface="Times New Roman"/>
-                <a:ea typeface="Times New Roman"/>
-                <a:cs typeface="Times New Roman"/>
-                <a:sym typeface="Times New Roman"/>
-              </a:rPr>
-              <a:t> repository (Enable Add README  button while creating repository) with format – </a:t>
-            </a:r>
-          </a:p>
-          <a:p>
-            <a:pPr marL="0" marR="0" lvl="0" indent="0" algn="l" rtl="0">
-              <a:lnSpc>
-                <a:spcPct val="162162"/>
-              </a:lnSpc>
-              <a:spcBef>
-                <a:spcPts val="0"/>
-              </a:spcBef>
-              <a:spcAft>
-                <a:spcPts val="0"/>
-              </a:spcAft>
-              <a:buClr>
-                <a:srgbClr val="2B3541"/>
-              </a:buClr>
-              <a:buSzPts val="1850"/>
-              <a:buFont typeface="Times New Roman"/>
-              <a:buNone/>
-            </a:pPr>
-            <a:r>
-              <a:rPr lang="en-US" sz="1850" dirty="0">
-                <a:solidFill>
-                  <a:srgbClr val="2B3541"/>
-                </a:solidFill>
-                <a:latin typeface="Times New Roman"/>
-                <a:ea typeface="Times New Roman"/>
-                <a:cs typeface="Times New Roman"/>
-                <a:sym typeface="Times New Roman"/>
-              </a:rPr>
-              <a:t>Please test and Paste the working  </a:t>
-            </a:r>
-            <a:r>
-              <a:rPr lang="en-US" sz="1850" dirty="0" err="1">
-                <a:solidFill>
-                  <a:srgbClr val="2B3541"/>
-                </a:solidFill>
-                <a:latin typeface="Times New Roman"/>
-                <a:ea typeface="Times New Roman"/>
-                <a:cs typeface="Times New Roman"/>
-                <a:sym typeface="Times New Roman"/>
-              </a:rPr>
-              <a:t>Github</a:t>
-            </a:r>
-            <a:r>
-              <a:rPr lang="en-US" sz="1850" dirty="0">
-                <a:solidFill>
-                  <a:srgbClr val="2B3541"/>
-                </a:solidFill>
-                <a:latin typeface="Times New Roman"/>
-                <a:ea typeface="Times New Roman"/>
-                <a:cs typeface="Times New Roman"/>
-                <a:sym typeface="Times New Roman"/>
-              </a:rPr>
-              <a:t> URL –</a:t>
-            </a:r>
-          </a:p>
-          <a:p>
-            <a:pPr marL="0" marR="0" lvl="0" indent="0" algn="l" rtl="0">
-              <a:lnSpc>
-                <a:spcPct val="162162"/>
-              </a:lnSpc>
-              <a:spcBef>
-                <a:spcPts val="0"/>
-              </a:spcBef>
-              <a:spcAft>
-                <a:spcPts val="0"/>
-              </a:spcAft>
-              <a:buClr>
-                <a:srgbClr val="2B3541"/>
-              </a:buClr>
-              <a:buSzPts val="1850"/>
-              <a:buFont typeface="Times New Roman"/>
-              <a:buNone/>
-            </a:pPr>
-            <a:r>
-              <a:rPr lang="en-US" sz="1850" dirty="0">
-                <a:solidFill>
-                  <a:srgbClr val="2B3541"/>
+                  <a:srgbClr val="000000"/>
                 </a:solidFill>
                 <a:latin typeface="Times New Roman"/>
                 <a:ea typeface="Times New Roman"/>
@@ -12337,9 +13105,9 @@
               </a:rPr>
               <a:t>https://github.com/shubham20387/IBM-ML-project</a:t>
             </a:r>
-            <a:endParaRPr lang="en-US" sz="1850" dirty="0">
+            <a:endParaRPr lang="en-US" sz="1850" b="0" i="0" u="none" strike="noStrike" cap="none" dirty="0">
               <a:solidFill>
-                <a:srgbClr val="2B3541"/>
+                <a:srgbClr val="000000"/>
               </a:solidFill>
               <a:latin typeface="Times New Roman"/>
               <a:ea typeface="Times New Roman"/>
@@ -12348,34 +13116,7 @@
             </a:endParaRPr>
           </a:p>
           <a:p>
-            <a:pPr marL="0" marR="0" lvl="0" indent="0" algn="l" rtl="0">
-              <a:lnSpc>
-                <a:spcPct val="162162"/>
-              </a:lnSpc>
-              <a:spcBef>
-                <a:spcPts val="0"/>
-              </a:spcBef>
-              <a:spcAft>
-                <a:spcPts val="0"/>
-              </a:spcAft>
-              <a:buClr>
-                <a:srgbClr val="2B3541"/>
-              </a:buClr>
-              <a:buSzPts val="1850"/>
-              <a:buFont typeface="Times New Roman"/>
-              <a:buNone/>
-            </a:pPr>
-            <a:endParaRPr lang="en-US" sz="1850" dirty="0">
-              <a:solidFill>
-                <a:srgbClr val="2B3541"/>
-              </a:solidFill>
-              <a:latin typeface="Times New Roman"/>
-              <a:ea typeface="Times New Roman"/>
-              <a:cs typeface="Times New Roman"/>
-            </a:endParaRPr>
-          </a:p>
-          <a:p>
-            <a:pPr>
+            <a:pPr lvl="0">
               <a:lnSpc>
                 <a:spcPct val="162162"/>
               </a:lnSpc>
@@ -12385,21 +13126,72 @@
               <a:buSzPts val="1850"/>
             </a:pPr>
             <a:r>
-              <a:rPr lang="en-US" sz="1850" b="1" dirty="0">
+              <a:rPr lang="en-US" sz="1850" b="0" i="0" u="none" strike="noStrike" cap="none" dirty="0">
                 <a:solidFill>
-                  <a:srgbClr val="2B3541"/>
+                  <a:srgbClr val="000000"/>
                 </a:solidFill>
                 <a:latin typeface="Times New Roman"/>
                 <a:ea typeface="Times New Roman"/>
                 <a:cs typeface="Times New Roman"/>
                 <a:sym typeface="Times New Roman"/>
               </a:rPr>
-              <a:t>Make sure you have Uploaded following three files into your </a:t>
+              <a:t>DEPLOYMENT LINK :</a:t>
             </a:r>
             <a:r>
-              <a:rPr lang="en-US" sz="1850" b="1" dirty="0" err="1">
+              <a:rPr lang="en-US" sz="2000" dirty="0"/>
+              <a:t> </a:t>
+            </a:r>
+            <a:r>
+              <a:rPr lang="en-US" sz="2000" dirty="0">
+                <a:hlinkClick r:id="rId4"/>
+              </a:rPr>
+              <a:t> https://ibm-ml-project.onrender.com/</a:t>
+            </a:r>
+            <a:endParaRPr lang="en-US" sz="2000" dirty="0"/>
+          </a:p>
+          <a:p>
+            <a:pPr lvl="0">
+              <a:lnSpc>
+                <a:spcPct val="162162"/>
+              </a:lnSpc>
+              <a:buClr>
+                <a:srgbClr val="2B3541"/>
+              </a:buClr>
+              <a:buSzPts val="1850"/>
+            </a:pPr>
+            <a:endParaRPr lang="en-US" sz="1850" dirty="0">
+              <a:latin typeface="Times New Roman"/>
+              <a:ea typeface="Times New Roman"/>
+              <a:cs typeface="Times New Roman"/>
+              <a:sym typeface="Times New Roman"/>
+            </a:endParaRPr>
+          </a:p>
+          <a:p>
+            <a:pPr lvl="0">
+              <a:lnSpc>
+                <a:spcPct val="162162"/>
+              </a:lnSpc>
+              <a:buClr>
+                <a:srgbClr val="2B3541"/>
+              </a:buClr>
+              <a:buSzPts val="1850"/>
+            </a:pPr>
+            <a:r>
+              <a:rPr lang="en-US" sz="1850" b="0" i="0" u="none" strike="noStrike" cap="none" dirty="0">
                 <a:solidFill>
-                  <a:srgbClr val="2B3541"/>
+                  <a:srgbClr val="000000"/>
+                </a:solidFill>
+                <a:latin typeface="Times New Roman"/>
+                <a:ea typeface="Times New Roman"/>
+                <a:cs typeface="Times New Roman"/>
+                <a:sym typeface="Times New Roman"/>
+              </a:rPr>
+              <a:t>Uploaded on </a:t>
+            </a:r>
+            <a:r>
+              <a:rPr lang="en-US" sz="1850" b="0" i="0" u="none" strike="noStrike" cap="none" dirty="0" err="1">
+                <a:solidFill>
+                  <a:srgbClr val="000000"/>
                 </a:solidFill>
                 <a:latin typeface="Times New Roman"/>
                 <a:ea typeface="Times New Roman"/>
@@ -12408,65 +13200,103 @@
               </a:rPr>
               <a:t>github</a:t>
             </a:r>
+            <a:endParaRPr lang="en-US" sz="1850" b="0" i="0" u="none" strike="noStrike" cap="none" dirty="0">
+              <a:solidFill>
+                <a:srgbClr val="000000"/>
+              </a:solidFill>
+              <a:latin typeface="Times New Roman"/>
+              <a:ea typeface="Times New Roman"/>
+              <a:cs typeface="Times New Roman"/>
+              <a:sym typeface="Times New Roman"/>
+            </a:endParaRPr>
+          </a:p>
+          <a:p>
+            <a:pPr marL="457200" lvl="0" indent="-457200">
+              <a:lnSpc>
+                <a:spcPct val="162162"/>
+              </a:lnSpc>
+              <a:buClr>
+                <a:srgbClr val="2B3541"/>
+              </a:buClr>
+              <a:buSzPts val="1850"/>
+              <a:buAutoNum type="arabicPeriod"/>
+            </a:pPr>
             <a:r>
-              <a:rPr lang="en-US" sz="1850" b="1" dirty="0">
+              <a:rPr lang="en-US" sz="1850" dirty="0">
+                <a:latin typeface="Times New Roman"/>
+                <a:ea typeface="Times New Roman"/>
+                <a:cs typeface="Times New Roman"/>
+                <a:sym typeface="Times New Roman"/>
+              </a:rPr>
+              <a:t>Project PPT</a:t>
+            </a:r>
+          </a:p>
+          <a:p>
+            <a:pPr marL="457200" lvl="0" indent="-457200">
+              <a:lnSpc>
+                <a:spcPct val="162162"/>
+              </a:lnSpc>
+              <a:buClr>
+                <a:srgbClr val="2B3541"/>
+              </a:buClr>
+              <a:buSzPts val="1850"/>
+              <a:buAutoNum type="arabicPeriod"/>
+            </a:pPr>
+            <a:r>
+              <a:rPr lang="en-US" sz="1850" b="0" i="0" u="none" strike="noStrike" cap="none" dirty="0">
                 <a:solidFill>
-                  <a:srgbClr val="2B3541"/>
+                  <a:srgbClr val="000000"/>
                 </a:solidFill>
                 <a:latin typeface="Times New Roman"/>
                 <a:ea typeface="Times New Roman"/>
                 <a:cs typeface="Times New Roman"/>
                 <a:sym typeface="Times New Roman"/>
               </a:rPr>
-              <a:t> repository  </a:t>
+              <a:t>Problem statement pdf</a:t>
             </a:r>
-            <a:br>
-              <a:rPr lang="en-US" sz="1850" dirty="0">
-                <a:latin typeface="Times New Roman"/>
-                <a:ea typeface="Times New Roman"/>
-                <a:cs typeface="Times New Roman"/>
-              </a:rPr>
-            </a:br>
+          </a:p>
+          <a:p>
+            <a:pPr marL="457200" lvl="0" indent="-457200">
+              <a:lnSpc>
+                <a:spcPct val="162162"/>
+              </a:lnSpc>
+              <a:buClr>
+                <a:srgbClr val="2B3541"/>
+              </a:buClr>
+              <a:buSzPts val="1850"/>
+              <a:buAutoNum type="arabicPeriod"/>
+            </a:pPr>
             <a:r>
               <a:rPr lang="en-US" sz="1850" dirty="0">
-                <a:solidFill>
-                  <a:srgbClr val="2B3541"/>
-                </a:solidFill>
                 <a:latin typeface="Times New Roman"/>
                 <a:ea typeface="Times New Roman"/>
                 <a:cs typeface="Times New Roman"/>
                 <a:sym typeface="Times New Roman"/>
               </a:rPr>
-              <a:t>1) Data.csv file, 2) yourproblemstatement.pdf file  3) your project presntation.pptx file 4) Python Notebook downloaded from IBM Cloud</a:t>
+              <a:t>Dataset</a:t>
             </a:r>
-            <a:endParaRPr lang="en-US" sz="1850" dirty="0">
-              <a:solidFill>
-                <a:srgbClr val="2B3541"/>
-              </a:solidFill>
-              <a:latin typeface="Times New Roman"/>
-              <a:ea typeface="Times New Roman"/>
-              <a:cs typeface="Times New Roman"/>
-            </a:endParaRPr>
           </a:p>
           <a:p>
-            <a:pPr marL="0" marR="0" lvl="0" indent="0" algn="l" rtl="0">
+            <a:pPr marL="457200" lvl="0" indent="-457200">
               <a:lnSpc>
                 <a:spcPct val="162162"/>
               </a:lnSpc>
-              <a:spcBef>
-                <a:spcPts val="0"/>
-              </a:spcBef>
-              <a:spcAft>
-                <a:spcPts val="0"/>
-              </a:spcAft>
               <a:buClr>
                 <a:srgbClr val="2B3541"/>
               </a:buClr>
               <a:buSzPts val="1850"/>
-              <a:buFont typeface="Times New Roman"/>
-              <a:buNone/>
+              <a:buAutoNum type="arabicPeriod"/>
             </a:pPr>
-            <a:endParaRPr sz="1850" b="0" i="0" u="none" strike="noStrike" cap="none" dirty="0">
+            <a:r>
+              <a:rPr lang="en-US" sz="1850" dirty="0">
+                <a:latin typeface="Times New Roman"/>
+                <a:ea typeface="Times New Roman"/>
+                <a:cs typeface="Times New Roman"/>
+                <a:sym typeface="Times New Roman"/>
+              </a:rPr>
+              <a:t>.env file and etc.</a:t>
+            </a:r>
+            <a:endParaRPr lang="en-US" sz="2000" b="0" i="0" u="none" strike="noStrike" cap="none" dirty="0">
               <a:solidFill>
                 <a:srgbClr val="000000"/>
               </a:solidFill>
@@ -12700,706 +13530,6 @@
         <p14:creationId xmlns:p14="http://schemas.microsoft.com/office/powerpoint/2010/main" val="2605851928"/>
       </p:ext>
     </p:extLst>
-  </p:cSld>
-  <p:clrMapOvr>
-    <a:masterClrMapping/>
-  </p:clrMapOvr>
-</p:sld>
-</file>
-
-<file path=ppt/slides/slide13.xml><?xml version="1.0" encoding="utf-8"?>
-<p:sld xmlns:a="http://schemas.openxmlformats.org/drawingml/2006/main" xmlns:r="http://schemas.openxmlformats.org/officeDocument/2006/relationships" xmlns:p="http://schemas.openxmlformats.org/presentationml/2006/main">
-  <p:cSld>
-    <p:spTree>
-      <p:nvGrpSpPr>
-        <p:cNvPr id="1" name="Shape 274">
-          <a:extLst>
-            <a:ext uri="{FF2B5EF4-FFF2-40B4-BE49-F238E27FC236}">
-              <a16:creationId xmlns:a16="http://schemas.microsoft.com/office/drawing/2014/main" id="{6FA0F82B-7EE5-EAB0-F470-130BDAC8254B}"/>
-            </a:ext>
-          </a:extLst>
-        </p:cNvPr>
-        <p:cNvGrpSpPr/>
-        <p:nvPr/>
-      </p:nvGrpSpPr>
-      <p:grpSpPr>
-        <a:xfrm>
-          <a:off x="0" y="0"/>
-          <a:ext cx="0" cy="0"/>
-          <a:chOff x="0" y="0"/>
-          <a:chExt cx="0" cy="0"/>
-        </a:xfrm>
-      </p:grpSpPr>
-      <p:sp>
-        <p:nvSpPr>
-          <p:cNvPr id="278" name="Google Shape;278;p18">
-            <a:extLst>
-              <a:ext uri="{FF2B5EF4-FFF2-40B4-BE49-F238E27FC236}">
-                <a16:creationId xmlns:a16="http://schemas.microsoft.com/office/drawing/2014/main" id="{0668C6FD-577A-7288-5642-1AFC22BD04F2}"/>
-              </a:ext>
-            </a:extLst>
-          </p:cNvPr>
-          <p:cNvSpPr/>
-          <p:nvPr/>
-        </p:nvSpPr>
-        <p:spPr>
-          <a:xfrm>
-            <a:off x="1218724" y="420729"/>
-            <a:ext cx="6444496" cy="704017"/>
-          </a:xfrm>
-          <a:prstGeom prst="rect">
-            <a:avLst/>
-          </a:prstGeom>
-          <a:noFill/>
-          <a:ln>
-            <a:noFill/>
-          </a:ln>
-        </p:spPr>
-        <p:txBody>
-          <a:bodyPr spcFirstLastPara="1" wrap="square" lIns="0" tIns="0" rIns="0" bIns="0" anchor="t" anchorCtr="0">
-            <a:noAutofit/>
-          </a:bodyPr>
-          <a:lstStyle/>
-          <a:p>
-            <a:pPr marL="0" marR="0" lvl="0" indent="0" algn="l" rtl="0">
-              <a:lnSpc>
-                <a:spcPct val="157142"/>
-              </a:lnSpc>
-              <a:spcBef>
-                <a:spcPts val="0"/>
-              </a:spcBef>
-              <a:spcAft>
-                <a:spcPts val="0"/>
-              </a:spcAft>
-              <a:buClr>
-                <a:srgbClr val="051D3A"/>
-              </a:buClr>
-              <a:buSzPts val="3500"/>
-              <a:buFont typeface="Times New Roman"/>
-              <a:buNone/>
-            </a:pPr>
-            <a:r>
-              <a:rPr lang="en-US" sz="2400" b="1">
-                <a:sym typeface="Times New Roman"/>
-              </a:rPr>
-              <a:t>Future Scope </a:t>
-            </a:r>
-            <a:endParaRPr sz="2400" b="1">
-              <a:sym typeface="Times New Roman"/>
-            </a:endParaRPr>
-          </a:p>
-        </p:txBody>
-      </p:sp>
-      <p:sp>
-        <p:nvSpPr>
-          <p:cNvPr id="279" name="Google Shape;279;p18">
-            <a:extLst>
-              <a:ext uri="{FF2B5EF4-FFF2-40B4-BE49-F238E27FC236}">
-                <a16:creationId xmlns:a16="http://schemas.microsoft.com/office/drawing/2014/main" id="{EAFA16CB-0A72-5AC5-69A0-ABF4A752B43F}"/>
-              </a:ext>
-            </a:extLst>
-          </p:cNvPr>
-          <p:cNvSpPr/>
-          <p:nvPr/>
-        </p:nvSpPr>
-        <p:spPr>
-          <a:xfrm>
-            <a:off x="1218724" y="1299062"/>
-            <a:ext cx="10458926" cy="4277001"/>
-          </a:xfrm>
-          <a:prstGeom prst="rect">
-            <a:avLst/>
-          </a:prstGeom>
-          <a:noFill/>
-          <a:ln>
-            <a:noFill/>
-          </a:ln>
-        </p:spPr>
-        <p:txBody>
-          <a:bodyPr spcFirstLastPara="1" wrap="square" lIns="0" tIns="0" rIns="0" bIns="0" anchor="t" anchorCtr="0">
-            <a:noAutofit/>
-          </a:bodyPr>
-          <a:lstStyle/>
-          <a:p>
-            <a:pPr marL="342900" indent="-342900">
-              <a:lnSpc>
-                <a:spcPct val="150000"/>
-              </a:lnSpc>
-              <a:buFont typeface="Arial" panose="020B0604020202020204" pitchFamily="34" charset="0"/>
-              <a:buChar char="•"/>
-            </a:pPr>
-            <a:r>
-              <a:rPr lang="en-IN" sz="1800" b="1" dirty="0"/>
-              <a:t>Edge AI Deployment:</a:t>
-            </a:r>
-            <a:r>
-              <a:rPr lang="en-IN" sz="1800" dirty="0"/>
-              <a:t> Integrating the trained models directly onto localized edge computing devices for real-time, low-latency fault prediction without relying on constant cloud connectivity.</a:t>
-            </a:r>
-          </a:p>
-          <a:p>
-            <a:pPr marL="342900" indent="-342900">
-              <a:lnSpc>
-                <a:spcPct val="150000"/>
-              </a:lnSpc>
-              <a:buFont typeface="Arial" panose="020B0604020202020204" pitchFamily="34" charset="0"/>
-              <a:buChar char="•"/>
-            </a:pPr>
-            <a:r>
-              <a:rPr lang="en-IN" sz="1800" b="1" dirty="0"/>
-              <a:t>Prescriptive Maintenance Action:</a:t>
-            </a:r>
-            <a:r>
-              <a:rPr lang="en-IN" sz="1800" dirty="0"/>
-              <a:t> Advancing the system from predicting failures to automatically recommending specific troubleshooting steps and auto-generating repair work orders.</a:t>
-            </a:r>
-          </a:p>
-          <a:p>
-            <a:pPr marL="342900" indent="-342900">
-              <a:lnSpc>
-                <a:spcPct val="150000"/>
-              </a:lnSpc>
-              <a:buFont typeface="Arial" panose="020B0604020202020204" pitchFamily="34" charset="0"/>
-              <a:buChar char="•"/>
-            </a:pPr>
-            <a:r>
-              <a:rPr lang="en-IN" sz="1800" b="1" dirty="0"/>
-              <a:t>Digital Twin Synchronization:</a:t>
-            </a:r>
-            <a:r>
-              <a:rPr lang="en-IN" sz="1800" dirty="0"/>
-              <a:t> Integrating the machine learning models into a fully dynamic 3D digital twin of the factory floor to simulate operational stress and visualize degradation in real-time.</a:t>
-            </a:r>
-          </a:p>
-          <a:p>
-            <a:pPr marL="342900" indent="-342900">
-              <a:lnSpc>
-                <a:spcPct val="150000"/>
-              </a:lnSpc>
-              <a:buFont typeface="Arial" panose="020B0604020202020204" pitchFamily="34" charset="0"/>
-              <a:buChar char="•"/>
-            </a:pPr>
-            <a:r>
-              <a:rPr lang="en-IN" sz="1800" b="1" dirty="0"/>
-              <a:t>Cross-Fleet Transfer Learning:</a:t>
-            </a:r>
-            <a:r>
-              <a:rPr lang="en-IN" sz="1800" dirty="0"/>
-              <a:t> Applying knowledge gained from existing machinery to newly installed equipment with minimal historical data, accelerating system deployment and accuracy.</a:t>
-            </a:r>
-          </a:p>
-          <a:p>
-            <a:pPr marL="342900" indent="-342900">
-              <a:lnSpc>
-                <a:spcPct val="150000"/>
-              </a:lnSpc>
-              <a:buFont typeface="Arial" panose="020B0604020202020204" pitchFamily="34" charset="0"/>
-              <a:buChar char="•"/>
-            </a:pPr>
-            <a:r>
-              <a:rPr lang="en-IN" sz="1800" b="1" dirty="0"/>
-              <a:t>Automated Supply Chain Integration:</a:t>
-            </a:r>
-            <a:r>
-              <a:rPr lang="en-IN" sz="1800" dirty="0"/>
-              <a:t> Linking predictive failure insights directly with inventory management systems to autonomously order replacement parts before a component actually breaks down.</a:t>
-            </a:r>
-          </a:p>
-        </p:txBody>
-      </p:sp>
-      <p:sp>
-        <p:nvSpPr>
-          <p:cNvPr id="280" name="Google Shape;280;p18">
-            <a:extLst>
-              <a:ext uri="{FF2B5EF4-FFF2-40B4-BE49-F238E27FC236}">
-                <a16:creationId xmlns:a16="http://schemas.microsoft.com/office/drawing/2014/main" id="{B888011B-E4AC-77DB-4A60-BE2C891C49F5}"/>
-              </a:ext>
-            </a:extLst>
-          </p:cNvPr>
-          <p:cNvSpPr/>
-          <p:nvPr/>
-        </p:nvSpPr>
-        <p:spPr>
-          <a:xfrm>
-            <a:off x="1218724" y="3360216"/>
-            <a:ext cx="7468553" cy="766048"/>
-          </a:xfrm>
-          <a:prstGeom prst="rect">
-            <a:avLst/>
-          </a:prstGeom>
-          <a:noFill/>
-          <a:ln>
-            <a:noFill/>
-          </a:ln>
-        </p:spPr>
-        <p:txBody>
-          <a:bodyPr spcFirstLastPara="1" wrap="square" lIns="0" tIns="0" rIns="0" bIns="0" anchor="t" anchorCtr="0">
-            <a:noAutofit/>
-          </a:bodyPr>
-          <a:lstStyle/>
-          <a:p>
-            <a:pPr marL="0" marR="0" lvl="0" indent="0" algn="l" rtl="0">
-              <a:lnSpc>
-                <a:spcPct val="162162"/>
-              </a:lnSpc>
-              <a:spcBef>
-                <a:spcPts val="0"/>
-              </a:spcBef>
-              <a:spcAft>
-                <a:spcPts val="0"/>
-              </a:spcAft>
-              <a:buClr>
-                <a:srgbClr val="2B3541"/>
-              </a:buClr>
-              <a:buSzPts val="1850"/>
-              <a:buFont typeface="Times New Roman"/>
-              <a:buNone/>
-            </a:pPr>
-            <a:r>
-              <a:rPr lang="en-US" sz="1850" b="0" i="0" u="none" strike="noStrike" cap="none">
-                <a:solidFill>
-                  <a:srgbClr val="2B3541"/>
-                </a:solidFill>
-                <a:latin typeface="Times New Roman"/>
-                <a:ea typeface="Times New Roman"/>
-                <a:cs typeface="Times New Roman"/>
-                <a:sym typeface="Times New Roman"/>
-              </a:rPr>
-              <a:t>·</a:t>
-            </a:r>
-            <a:endParaRPr sz="1850" b="0" i="0" u="none" strike="noStrike" cap="none">
-              <a:solidFill>
-                <a:srgbClr val="000000"/>
-              </a:solidFill>
-              <a:latin typeface="Times New Roman"/>
-              <a:ea typeface="Times New Roman"/>
-              <a:cs typeface="Times New Roman"/>
-              <a:sym typeface="Times New Roman"/>
-            </a:endParaRPr>
-          </a:p>
-        </p:txBody>
-      </p:sp>
-      <p:sp>
-        <p:nvSpPr>
-          <p:cNvPr id="281" name="Google Shape;281;p18">
-            <a:extLst>
-              <a:ext uri="{FF2B5EF4-FFF2-40B4-BE49-F238E27FC236}">
-                <a16:creationId xmlns:a16="http://schemas.microsoft.com/office/drawing/2014/main" id="{91F05971-9256-10B5-6575-4E7C679C6DAA}"/>
-              </a:ext>
-            </a:extLst>
-          </p:cNvPr>
-          <p:cNvSpPr/>
-          <p:nvPr/>
-        </p:nvSpPr>
-        <p:spPr>
-          <a:xfrm>
-            <a:off x="1218724" y="4395464"/>
-            <a:ext cx="7468553" cy="766048"/>
-          </a:xfrm>
-          <a:prstGeom prst="rect">
-            <a:avLst/>
-          </a:prstGeom>
-          <a:noFill/>
-          <a:ln>
-            <a:noFill/>
-          </a:ln>
-        </p:spPr>
-        <p:txBody>
-          <a:bodyPr spcFirstLastPara="1" wrap="square" lIns="0" tIns="0" rIns="0" bIns="0" anchor="t" anchorCtr="0">
-            <a:noAutofit/>
-          </a:bodyPr>
-          <a:lstStyle/>
-          <a:p>
-            <a:pPr marL="0" marR="0" lvl="0" indent="0" algn="l" rtl="0">
-              <a:lnSpc>
-                <a:spcPct val="162162"/>
-              </a:lnSpc>
-              <a:spcBef>
-                <a:spcPts val="0"/>
-              </a:spcBef>
-              <a:spcAft>
-                <a:spcPts val="0"/>
-              </a:spcAft>
-              <a:buClr>
-                <a:srgbClr val="2B3541"/>
-              </a:buClr>
-              <a:buSzPts val="1850"/>
-              <a:buFont typeface="Times New Roman"/>
-              <a:buNone/>
-            </a:pPr>
-            <a:r>
-              <a:rPr lang="en-US" sz="1850" b="0" i="0" u="none" strike="noStrike" cap="none">
-                <a:solidFill>
-                  <a:srgbClr val="2B3541"/>
-                </a:solidFill>
-                <a:latin typeface="Times New Roman"/>
-                <a:ea typeface="Times New Roman"/>
-                <a:cs typeface="Times New Roman"/>
-                <a:sym typeface="Times New Roman"/>
-              </a:rPr>
-              <a:t>·</a:t>
-            </a:r>
-            <a:endParaRPr sz="1850" b="0" i="0" u="none" strike="noStrike" cap="none">
-              <a:solidFill>
-                <a:srgbClr val="000000"/>
-              </a:solidFill>
-              <a:latin typeface="Times New Roman"/>
-              <a:ea typeface="Times New Roman"/>
-              <a:cs typeface="Times New Roman"/>
-              <a:sym typeface="Times New Roman"/>
-            </a:endParaRPr>
-          </a:p>
-        </p:txBody>
-      </p:sp>
-      <p:sp>
-        <p:nvSpPr>
-          <p:cNvPr id="282" name="Google Shape;282;p18">
-            <a:extLst>
-              <a:ext uri="{FF2B5EF4-FFF2-40B4-BE49-F238E27FC236}">
-                <a16:creationId xmlns:a16="http://schemas.microsoft.com/office/drawing/2014/main" id="{F1C3EBC2-438F-C150-9ABF-F14321C2CC5C}"/>
-              </a:ext>
-            </a:extLst>
-          </p:cNvPr>
-          <p:cNvSpPr/>
-          <p:nvPr/>
-        </p:nvSpPr>
-        <p:spPr>
-          <a:xfrm>
-            <a:off x="1218724" y="5430713"/>
-            <a:ext cx="7468553" cy="383024"/>
-          </a:xfrm>
-          <a:prstGeom prst="rect">
-            <a:avLst/>
-          </a:prstGeom>
-          <a:noFill/>
-          <a:ln>
-            <a:noFill/>
-          </a:ln>
-        </p:spPr>
-        <p:txBody>
-          <a:bodyPr spcFirstLastPara="1" wrap="square" lIns="0" tIns="0" rIns="0" bIns="0" anchor="t" anchorCtr="0">
-            <a:noAutofit/>
-          </a:bodyPr>
-          <a:lstStyle/>
-          <a:p>
-            <a:pPr marL="0" marR="0" lvl="0" indent="0" algn="l" rtl="0">
-              <a:lnSpc>
-                <a:spcPct val="162162"/>
-              </a:lnSpc>
-              <a:spcBef>
-                <a:spcPts val="0"/>
-              </a:spcBef>
-              <a:spcAft>
-                <a:spcPts val="0"/>
-              </a:spcAft>
-              <a:buClr>
-                <a:srgbClr val="2B3541"/>
-              </a:buClr>
-              <a:buSzPts val="1850"/>
-              <a:buFont typeface="Times New Roman"/>
-              <a:buNone/>
-            </a:pPr>
-            <a:r>
-              <a:rPr lang="en-US" sz="1850" b="0" i="0" u="none" strike="noStrike" cap="none">
-                <a:solidFill>
-                  <a:srgbClr val="2B3541"/>
-                </a:solidFill>
-                <a:latin typeface="Times New Roman"/>
-                <a:ea typeface="Times New Roman"/>
-                <a:cs typeface="Times New Roman"/>
-                <a:sym typeface="Times New Roman"/>
-              </a:rPr>
-              <a:t>·</a:t>
-            </a:r>
-            <a:endParaRPr sz="1850" b="0" i="0" u="none" strike="noStrike" cap="none">
-              <a:solidFill>
-                <a:srgbClr val="000000"/>
-              </a:solidFill>
-              <a:latin typeface="Times New Roman"/>
-              <a:ea typeface="Times New Roman"/>
-              <a:cs typeface="Times New Roman"/>
-              <a:sym typeface="Times New Roman"/>
-            </a:endParaRPr>
-          </a:p>
-        </p:txBody>
-      </p:sp>
-    </p:spTree>
-    <p:extLst>
-      <p:ext uri="{BB962C8B-B14F-4D97-AF65-F5344CB8AC3E}">
-        <p14:creationId xmlns:p14="http://schemas.microsoft.com/office/powerpoint/2010/main" val="2136706720"/>
-      </p:ext>
-    </p:extLst>
-  </p:cSld>
-  <p:clrMapOvr>
-    <a:masterClrMapping/>
-  </p:clrMapOvr>
-</p:sld>
-</file>
-
-<file path=ppt/slides/slide14.xml><?xml version="1.0" encoding="utf-8"?>
-<p:sld xmlns:a="http://schemas.openxmlformats.org/drawingml/2006/main" xmlns:r="http://schemas.openxmlformats.org/officeDocument/2006/relationships" xmlns:p="http://schemas.openxmlformats.org/presentationml/2006/main">
-  <p:cSld>
-    <p:spTree>
-      <p:nvGrpSpPr>
-        <p:cNvPr id="1" name=""/>
-        <p:cNvGrpSpPr/>
-        <p:nvPr/>
-      </p:nvGrpSpPr>
-      <p:grpSpPr>
-        <a:xfrm>
-          <a:off x="0" y="0"/>
-          <a:ext cx="0" cy="0"/>
-          <a:chOff x="0" y="0"/>
-          <a:chExt cx="0" cy="0"/>
-        </a:xfrm>
-      </p:grpSpPr>
-      <p:sp>
-        <p:nvSpPr>
-          <p:cNvPr id="6" name="TextBox 5">
-            <a:extLst>
-              <a:ext uri="{FF2B5EF4-FFF2-40B4-BE49-F238E27FC236}">
-                <a16:creationId xmlns:a16="http://schemas.microsoft.com/office/drawing/2014/main" id="{3F1C7BCA-5DD7-F4D3-A937-D1C56976DA01}"/>
-              </a:ext>
-            </a:extLst>
-          </p:cNvPr>
-          <p:cNvSpPr txBox="1"/>
-          <p:nvPr/>
-        </p:nvSpPr>
-        <p:spPr>
-          <a:xfrm>
-            <a:off x="327949" y="207380"/>
-            <a:ext cx="6096000" cy="677108"/>
-          </a:xfrm>
-          <a:prstGeom prst="rect">
-            <a:avLst/>
-          </a:prstGeom>
-          <a:noFill/>
-        </p:spPr>
-        <p:txBody>
-          <a:bodyPr rot="0" spcFirstLastPara="0" vertOverflow="overflow" horzOverflow="overflow" vert="horz" wrap="square" lIns="91440" tIns="45720" rIns="91440" bIns="45720" numCol="1" spcCol="0" rtlCol="0" fromWordArt="0" anchor="t" anchorCtr="0" forceAA="0" compatLnSpc="1">
-            <a:prstTxWarp prst="textNoShape">
-              <a:avLst/>
-            </a:prstTxWarp>
-            <a:spAutoFit/>
-          </a:bodyPr>
-          <a:lstStyle/>
-          <a:p>
-            <a:r>
-              <a:rPr lang="en-US" sz="2400" b="1"/>
-              <a:t>Certificates Earned:</a:t>
-            </a:r>
-          </a:p>
-          <a:p>
-            <a:pPr algn="ctr"/>
-            <a:endParaRPr lang="en-US"/>
-          </a:p>
-        </p:txBody>
-      </p:sp>
-      <p:pic>
-        <p:nvPicPr>
-          <p:cNvPr id="4" name="Picture 3">
-            <a:extLst>
-              <a:ext uri="{FF2B5EF4-FFF2-40B4-BE49-F238E27FC236}">
-                <a16:creationId xmlns:a16="http://schemas.microsoft.com/office/drawing/2014/main" id="{A037CFD0-B7FF-D9BE-3433-88E5844EF332}"/>
-              </a:ext>
-            </a:extLst>
-          </p:cNvPr>
-          <p:cNvPicPr>
-            <a:picLocks noChangeAspect="1"/>
-          </p:cNvPicPr>
-          <p:nvPr/>
-        </p:nvPicPr>
-        <p:blipFill>
-          <a:blip r:embed="rId2"/>
-          <a:srcRect/>
-          <a:stretch/>
-        </p:blipFill>
-        <p:spPr>
-          <a:xfrm>
-            <a:off x="2884615" y="1015711"/>
-            <a:ext cx="6422769" cy="4826578"/>
-          </a:xfrm>
-          <a:prstGeom prst="rect">
-            <a:avLst/>
-          </a:prstGeom>
-        </p:spPr>
-      </p:pic>
-    </p:spTree>
-    <p:extLst>
-      <p:ext uri="{BB962C8B-B14F-4D97-AF65-F5344CB8AC3E}">
-        <p14:creationId xmlns:p14="http://schemas.microsoft.com/office/powerpoint/2010/main" val="1229047658"/>
-      </p:ext>
-    </p:extLst>
-  </p:cSld>
-  <p:clrMapOvr>
-    <a:masterClrMapping/>
-  </p:clrMapOvr>
-</p:sld>
-</file>
-
-<file path=ppt/slides/slide15.xml><?xml version="1.0" encoding="utf-8"?>
-<p:sld xmlns:a="http://schemas.openxmlformats.org/drawingml/2006/main" xmlns:r="http://schemas.openxmlformats.org/officeDocument/2006/relationships" xmlns:p="http://schemas.openxmlformats.org/presentationml/2006/main">
-  <p:cSld>
-    <p:spTree>
-      <p:nvGrpSpPr>
-        <p:cNvPr id="1" name=""/>
-        <p:cNvGrpSpPr/>
-        <p:nvPr/>
-      </p:nvGrpSpPr>
-      <p:grpSpPr>
-        <a:xfrm>
-          <a:off x="0" y="0"/>
-          <a:ext cx="0" cy="0"/>
-          <a:chOff x="0" y="0"/>
-          <a:chExt cx="0" cy="0"/>
-        </a:xfrm>
-      </p:grpSpPr>
-      <p:pic>
-        <p:nvPicPr>
-          <p:cNvPr id="4" name="Picture 3">
-            <a:extLst>
-              <a:ext uri="{FF2B5EF4-FFF2-40B4-BE49-F238E27FC236}">
-                <a16:creationId xmlns:a16="http://schemas.microsoft.com/office/drawing/2014/main" id="{099C3698-991D-7A38-C456-893C84C23FC9}"/>
-              </a:ext>
-            </a:extLst>
-          </p:cNvPr>
-          <p:cNvPicPr>
-            <a:picLocks noChangeAspect="1"/>
-          </p:cNvPicPr>
-          <p:nvPr/>
-        </p:nvPicPr>
-        <p:blipFill>
-          <a:blip r:embed="rId2"/>
-          <a:srcRect l="2384" r="2384"/>
-          <a:stretch/>
-        </p:blipFill>
-        <p:spPr>
-          <a:xfrm>
-            <a:off x="2507223" y="1099711"/>
-            <a:ext cx="7177553" cy="4658577"/>
-          </a:xfrm>
-          <a:prstGeom prst="rect">
-            <a:avLst/>
-          </a:prstGeom>
-        </p:spPr>
-      </p:pic>
-      <p:sp>
-        <p:nvSpPr>
-          <p:cNvPr id="5" name="TextBox 4">
-            <a:extLst>
-              <a:ext uri="{FF2B5EF4-FFF2-40B4-BE49-F238E27FC236}">
-                <a16:creationId xmlns:a16="http://schemas.microsoft.com/office/drawing/2014/main" id="{CA8544A9-CF92-3FAF-D3EE-31DF90F7A64D}"/>
-              </a:ext>
-            </a:extLst>
-          </p:cNvPr>
-          <p:cNvSpPr txBox="1"/>
-          <p:nvPr/>
-        </p:nvSpPr>
-        <p:spPr>
-          <a:xfrm>
-            <a:off x="176696" y="226391"/>
-            <a:ext cx="6096000" cy="677108"/>
-          </a:xfrm>
-          <a:prstGeom prst="rect">
-            <a:avLst/>
-          </a:prstGeom>
-          <a:noFill/>
-        </p:spPr>
-        <p:txBody>
-          <a:bodyPr rot="0" spcFirstLastPara="0" vertOverflow="overflow" horzOverflow="overflow" vert="horz" wrap="square" lIns="91440" tIns="45720" rIns="91440" bIns="45720" numCol="1" spcCol="0" rtlCol="0" fromWordArt="0" anchor="t" anchorCtr="0" forceAA="0" compatLnSpc="1">
-            <a:prstTxWarp prst="textNoShape">
-              <a:avLst/>
-            </a:prstTxWarp>
-            <a:spAutoFit/>
-          </a:bodyPr>
-          <a:lstStyle/>
-          <a:p>
-            <a:r>
-              <a:rPr lang="en-US" sz="2400" b="1" i="0" u="none" strike="noStrike" baseline="0">
-                <a:solidFill>
-                  <a:srgbClr val="000000"/>
-                </a:solidFill>
-                <a:latin typeface="Arial"/>
-              </a:rPr>
-              <a:t>Certificates Earned:</a:t>
-            </a:r>
-            <a:r>
-              <a:rPr sz="2400" b="0" i="0">
-                <a:solidFill>
-                  <a:srgbClr val="000000"/>
-                </a:solidFill>
-                <a:latin typeface="Arial"/>
-                <a:ea typeface="Arial"/>
-                <a:cs typeface="Arial"/>
-              </a:rPr>
-              <a:t>​</a:t>
-            </a:r>
-            <a:endParaRPr lang="en-US"/>
-          </a:p>
-          <a:p>
-            <a:pPr algn="ctr"/>
-            <a:endParaRPr lang="en-US"/>
-          </a:p>
-        </p:txBody>
-      </p:sp>
-    </p:spTree>
-    <p:extLst>
-      <p:ext uri="{BB962C8B-B14F-4D97-AF65-F5344CB8AC3E}">
-        <p14:creationId xmlns:p14="http://schemas.microsoft.com/office/powerpoint/2010/main" val="2506610743"/>
-      </p:ext>
-    </p:extLst>
-  </p:cSld>
-  <p:clrMapOvr>
-    <a:masterClrMapping/>
-  </p:clrMapOvr>
-</p:sld>
-</file>
-
-<file path=ppt/slides/slide16.xml><?xml version="1.0" encoding="utf-8"?>
-<p:sld xmlns:a="http://schemas.openxmlformats.org/drawingml/2006/main" xmlns:r="http://schemas.openxmlformats.org/officeDocument/2006/relationships" xmlns:p="http://schemas.openxmlformats.org/presentationml/2006/main">
-  <p:cSld>
-    <p:spTree>
-      <p:nvGrpSpPr>
-        <p:cNvPr id="1" name="Shape 306"/>
-        <p:cNvGrpSpPr/>
-        <p:nvPr/>
-      </p:nvGrpSpPr>
-      <p:grpSpPr>
-        <a:xfrm>
-          <a:off x="0" y="0"/>
-          <a:ext cx="0" cy="0"/>
-          <a:chOff x="0" y="0"/>
-          <a:chExt cx="0" cy="0"/>
-        </a:xfrm>
-      </p:grpSpPr>
-      <p:pic>
-        <p:nvPicPr>
-          <p:cNvPr id="310" name="Google Shape;310;p20"/>
-          <p:cNvPicPr preferRelativeResize="0"/>
-          <p:nvPr/>
-        </p:nvPicPr>
-        <p:blipFill rotWithShape="1">
-          <a:blip r:embed="rId3">
-            <a:alphaModFix/>
-          </a:blip>
-          <a:srcRect/>
-          <a:stretch/>
-        </p:blipFill>
-        <p:spPr>
-          <a:xfrm>
-            <a:off x="0" y="2190302"/>
-            <a:ext cx="12192000" cy="2477396"/>
-          </a:xfrm>
-          <a:prstGeom prst="rect">
-            <a:avLst/>
-          </a:prstGeom>
-          <a:noFill/>
-          <a:ln>
-            <a:noFill/>
-          </a:ln>
-        </p:spPr>
-      </p:pic>
-    </p:spTree>
   </p:cSld>
   <p:clrMapOvr>
     <a:masterClrMapping/>
@@ -14313,6 +14443,973 @@
 </p:sld>
 </file>
 
+<file path=ppt/slides/slide20.xml><?xml version="1.0" encoding="utf-8"?>
+<p:sld xmlns:a="http://schemas.openxmlformats.org/drawingml/2006/main" xmlns:r="http://schemas.openxmlformats.org/officeDocument/2006/relationships" xmlns:p="http://schemas.openxmlformats.org/presentationml/2006/main">
+  <p:cSld>
+    <p:spTree>
+      <p:nvGrpSpPr>
+        <p:cNvPr id="1" name="Shape 274">
+          <a:extLst>
+            <a:ext uri="{FF2B5EF4-FFF2-40B4-BE49-F238E27FC236}">
+              <a16:creationId xmlns:a16="http://schemas.microsoft.com/office/drawing/2014/main" id="{6FA0F82B-7EE5-EAB0-F470-130BDAC8254B}"/>
+            </a:ext>
+          </a:extLst>
+        </p:cNvPr>
+        <p:cNvGrpSpPr/>
+        <p:nvPr/>
+      </p:nvGrpSpPr>
+      <p:grpSpPr>
+        <a:xfrm>
+          <a:off x="0" y="0"/>
+          <a:ext cx="0" cy="0"/>
+          <a:chOff x="0" y="0"/>
+          <a:chExt cx="0" cy="0"/>
+        </a:xfrm>
+      </p:grpSpPr>
+      <p:sp>
+        <p:nvSpPr>
+          <p:cNvPr id="278" name="Google Shape;278;p18">
+            <a:extLst>
+              <a:ext uri="{FF2B5EF4-FFF2-40B4-BE49-F238E27FC236}">
+                <a16:creationId xmlns:a16="http://schemas.microsoft.com/office/drawing/2014/main" id="{0668C6FD-577A-7288-5642-1AFC22BD04F2}"/>
+              </a:ext>
+            </a:extLst>
+          </p:cNvPr>
+          <p:cNvSpPr/>
+          <p:nvPr/>
+        </p:nvSpPr>
+        <p:spPr>
+          <a:xfrm>
+            <a:off x="1218724" y="420729"/>
+            <a:ext cx="6444496" cy="704017"/>
+          </a:xfrm>
+          <a:prstGeom prst="rect">
+            <a:avLst/>
+          </a:prstGeom>
+          <a:noFill/>
+          <a:ln>
+            <a:noFill/>
+          </a:ln>
+        </p:spPr>
+        <p:txBody>
+          <a:bodyPr spcFirstLastPara="1" wrap="square" lIns="0" tIns="0" rIns="0" bIns="0" anchor="t" anchorCtr="0">
+            <a:noAutofit/>
+          </a:bodyPr>
+          <a:lstStyle/>
+          <a:p>
+            <a:pPr marL="0" marR="0" lvl="0" indent="0" algn="l" rtl="0">
+              <a:lnSpc>
+                <a:spcPct val="157142"/>
+              </a:lnSpc>
+              <a:spcBef>
+                <a:spcPts val="0"/>
+              </a:spcBef>
+              <a:spcAft>
+                <a:spcPts val="0"/>
+              </a:spcAft>
+              <a:buClr>
+                <a:srgbClr val="051D3A"/>
+              </a:buClr>
+              <a:buSzPts val="3500"/>
+              <a:buFont typeface="Times New Roman"/>
+              <a:buNone/>
+            </a:pPr>
+            <a:r>
+              <a:rPr lang="en-US" sz="2400" b="1">
+                <a:sym typeface="Times New Roman"/>
+              </a:rPr>
+              <a:t>Future Scope </a:t>
+            </a:r>
+            <a:endParaRPr sz="2400" b="1">
+              <a:sym typeface="Times New Roman"/>
+            </a:endParaRPr>
+          </a:p>
+        </p:txBody>
+      </p:sp>
+      <p:sp>
+        <p:nvSpPr>
+          <p:cNvPr id="279" name="Google Shape;279;p18">
+            <a:extLst>
+              <a:ext uri="{FF2B5EF4-FFF2-40B4-BE49-F238E27FC236}">
+                <a16:creationId xmlns:a16="http://schemas.microsoft.com/office/drawing/2014/main" id="{EAFA16CB-0A72-5AC5-69A0-ABF4A752B43F}"/>
+              </a:ext>
+            </a:extLst>
+          </p:cNvPr>
+          <p:cNvSpPr/>
+          <p:nvPr/>
+        </p:nvSpPr>
+        <p:spPr>
+          <a:xfrm>
+            <a:off x="1218724" y="1299062"/>
+            <a:ext cx="10458926" cy="4277001"/>
+          </a:xfrm>
+          <a:prstGeom prst="rect">
+            <a:avLst/>
+          </a:prstGeom>
+          <a:noFill/>
+          <a:ln>
+            <a:noFill/>
+          </a:ln>
+        </p:spPr>
+        <p:txBody>
+          <a:bodyPr spcFirstLastPara="1" wrap="square" lIns="0" tIns="0" rIns="0" bIns="0" anchor="t" anchorCtr="0">
+            <a:noAutofit/>
+          </a:bodyPr>
+          <a:lstStyle/>
+          <a:p>
+            <a:pPr marL="342900" indent="-342900">
+              <a:lnSpc>
+                <a:spcPct val="150000"/>
+              </a:lnSpc>
+              <a:buFont typeface="Arial" panose="020B0604020202020204" pitchFamily="34" charset="0"/>
+              <a:buChar char="•"/>
+            </a:pPr>
+            <a:r>
+              <a:rPr lang="en-IN" sz="1800" b="1" dirty="0"/>
+              <a:t>Edge AI Deployment:</a:t>
+            </a:r>
+            <a:r>
+              <a:rPr lang="en-IN" sz="1800" dirty="0"/>
+              <a:t> Integrating the trained models directly onto localized edge computing devices for real-time, low-latency fault prediction without relying on constant cloud connectivity.</a:t>
+            </a:r>
+          </a:p>
+          <a:p>
+            <a:pPr marL="342900" indent="-342900">
+              <a:lnSpc>
+                <a:spcPct val="150000"/>
+              </a:lnSpc>
+              <a:buFont typeface="Arial" panose="020B0604020202020204" pitchFamily="34" charset="0"/>
+              <a:buChar char="•"/>
+            </a:pPr>
+            <a:r>
+              <a:rPr lang="en-IN" sz="1800" b="1" dirty="0"/>
+              <a:t>Prescriptive Maintenance Action:</a:t>
+            </a:r>
+            <a:r>
+              <a:rPr lang="en-IN" sz="1800" dirty="0"/>
+              <a:t> Advancing the system from predicting failures to automatically recommending specific troubleshooting steps and auto-generating repair work orders.</a:t>
+            </a:r>
+          </a:p>
+          <a:p>
+            <a:pPr marL="342900" indent="-342900">
+              <a:lnSpc>
+                <a:spcPct val="150000"/>
+              </a:lnSpc>
+              <a:buFont typeface="Arial" panose="020B0604020202020204" pitchFamily="34" charset="0"/>
+              <a:buChar char="•"/>
+            </a:pPr>
+            <a:r>
+              <a:rPr lang="en-IN" sz="1800" b="1" dirty="0"/>
+              <a:t>Digital Twin Synchronization:</a:t>
+            </a:r>
+            <a:r>
+              <a:rPr lang="en-IN" sz="1800" dirty="0"/>
+              <a:t> Integrating the machine learning models into a fully dynamic 3D digital twin of the factory floor to simulate operational stress and visualize degradation in real-time.</a:t>
+            </a:r>
+          </a:p>
+          <a:p>
+            <a:pPr marL="342900" indent="-342900">
+              <a:lnSpc>
+                <a:spcPct val="150000"/>
+              </a:lnSpc>
+              <a:buFont typeface="Arial" panose="020B0604020202020204" pitchFamily="34" charset="0"/>
+              <a:buChar char="•"/>
+            </a:pPr>
+            <a:r>
+              <a:rPr lang="en-IN" sz="1800" b="1" dirty="0"/>
+              <a:t>Cross-Fleet Transfer Learning:</a:t>
+            </a:r>
+            <a:r>
+              <a:rPr lang="en-IN" sz="1800" dirty="0"/>
+              <a:t> Applying knowledge gained from existing machinery to newly installed equipment with minimal historical data, accelerating system deployment and accuracy.</a:t>
+            </a:r>
+          </a:p>
+          <a:p>
+            <a:pPr marL="342900" indent="-342900">
+              <a:lnSpc>
+                <a:spcPct val="150000"/>
+              </a:lnSpc>
+              <a:buFont typeface="Arial" panose="020B0604020202020204" pitchFamily="34" charset="0"/>
+              <a:buChar char="•"/>
+            </a:pPr>
+            <a:r>
+              <a:rPr lang="en-IN" sz="1800" b="1" dirty="0"/>
+              <a:t>Automated Supply Chain Integration:</a:t>
+            </a:r>
+            <a:r>
+              <a:rPr lang="en-IN" sz="1800" dirty="0"/>
+              <a:t> Linking predictive failure insights directly with inventory management systems to autonomously order replacement parts before a component actually breaks down.</a:t>
+            </a:r>
+          </a:p>
+        </p:txBody>
+      </p:sp>
+      <p:sp>
+        <p:nvSpPr>
+          <p:cNvPr id="280" name="Google Shape;280;p18">
+            <a:extLst>
+              <a:ext uri="{FF2B5EF4-FFF2-40B4-BE49-F238E27FC236}">
+                <a16:creationId xmlns:a16="http://schemas.microsoft.com/office/drawing/2014/main" id="{B888011B-E4AC-77DB-4A60-BE2C891C49F5}"/>
+              </a:ext>
+            </a:extLst>
+          </p:cNvPr>
+          <p:cNvSpPr/>
+          <p:nvPr/>
+        </p:nvSpPr>
+        <p:spPr>
+          <a:xfrm>
+            <a:off x="1218724" y="3360216"/>
+            <a:ext cx="7468553" cy="766048"/>
+          </a:xfrm>
+          <a:prstGeom prst="rect">
+            <a:avLst/>
+          </a:prstGeom>
+          <a:noFill/>
+          <a:ln>
+            <a:noFill/>
+          </a:ln>
+        </p:spPr>
+        <p:txBody>
+          <a:bodyPr spcFirstLastPara="1" wrap="square" lIns="0" tIns="0" rIns="0" bIns="0" anchor="t" anchorCtr="0">
+            <a:noAutofit/>
+          </a:bodyPr>
+          <a:lstStyle/>
+          <a:p>
+            <a:pPr marL="0" marR="0" lvl="0" indent="0" algn="l" rtl="0">
+              <a:lnSpc>
+                <a:spcPct val="162162"/>
+              </a:lnSpc>
+              <a:spcBef>
+                <a:spcPts val="0"/>
+              </a:spcBef>
+              <a:spcAft>
+                <a:spcPts val="0"/>
+              </a:spcAft>
+              <a:buClr>
+                <a:srgbClr val="2B3541"/>
+              </a:buClr>
+              <a:buSzPts val="1850"/>
+              <a:buFont typeface="Times New Roman"/>
+              <a:buNone/>
+            </a:pPr>
+            <a:r>
+              <a:rPr lang="en-US" sz="1850" b="0" i="0" u="none" strike="noStrike" cap="none">
+                <a:solidFill>
+                  <a:srgbClr val="2B3541"/>
+                </a:solidFill>
+                <a:latin typeface="Times New Roman"/>
+                <a:ea typeface="Times New Roman"/>
+                <a:cs typeface="Times New Roman"/>
+                <a:sym typeface="Times New Roman"/>
+              </a:rPr>
+              <a:t>·</a:t>
+            </a:r>
+            <a:endParaRPr sz="1850" b="0" i="0" u="none" strike="noStrike" cap="none">
+              <a:solidFill>
+                <a:srgbClr val="000000"/>
+              </a:solidFill>
+              <a:latin typeface="Times New Roman"/>
+              <a:ea typeface="Times New Roman"/>
+              <a:cs typeface="Times New Roman"/>
+              <a:sym typeface="Times New Roman"/>
+            </a:endParaRPr>
+          </a:p>
+        </p:txBody>
+      </p:sp>
+      <p:sp>
+        <p:nvSpPr>
+          <p:cNvPr id="281" name="Google Shape;281;p18">
+            <a:extLst>
+              <a:ext uri="{FF2B5EF4-FFF2-40B4-BE49-F238E27FC236}">
+                <a16:creationId xmlns:a16="http://schemas.microsoft.com/office/drawing/2014/main" id="{91F05971-9256-10B5-6575-4E7C679C6DAA}"/>
+              </a:ext>
+            </a:extLst>
+          </p:cNvPr>
+          <p:cNvSpPr/>
+          <p:nvPr/>
+        </p:nvSpPr>
+        <p:spPr>
+          <a:xfrm>
+            <a:off x="1218724" y="4395464"/>
+            <a:ext cx="7468553" cy="766048"/>
+          </a:xfrm>
+          <a:prstGeom prst="rect">
+            <a:avLst/>
+          </a:prstGeom>
+          <a:noFill/>
+          <a:ln>
+            <a:noFill/>
+          </a:ln>
+        </p:spPr>
+        <p:txBody>
+          <a:bodyPr spcFirstLastPara="1" wrap="square" lIns="0" tIns="0" rIns="0" bIns="0" anchor="t" anchorCtr="0">
+            <a:noAutofit/>
+          </a:bodyPr>
+          <a:lstStyle/>
+          <a:p>
+            <a:pPr marL="0" marR="0" lvl="0" indent="0" algn="l" rtl="0">
+              <a:lnSpc>
+                <a:spcPct val="162162"/>
+              </a:lnSpc>
+              <a:spcBef>
+                <a:spcPts val="0"/>
+              </a:spcBef>
+              <a:spcAft>
+                <a:spcPts val="0"/>
+              </a:spcAft>
+              <a:buClr>
+                <a:srgbClr val="2B3541"/>
+              </a:buClr>
+              <a:buSzPts val="1850"/>
+              <a:buFont typeface="Times New Roman"/>
+              <a:buNone/>
+            </a:pPr>
+            <a:r>
+              <a:rPr lang="en-US" sz="1850" b="0" i="0" u="none" strike="noStrike" cap="none">
+                <a:solidFill>
+                  <a:srgbClr val="2B3541"/>
+                </a:solidFill>
+                <a:latin typeface="Times New Roman"/>
+                <a:ea typeface="Times New Roman"/>
+                <a:cs typeface="Times New Roman"/>
+                <a:sym typeface="Times New Roman"/>
+              </a:rPr>
+              <a:t>·</a:t>
+            </a:r>
+            <a:endParaRPr sz="1850" b="0" i="0" u="none" strike="noStrike" cap="none">
+              <a:solidFill>
+                <a:srgbClr val="000000"/>
+              </a:solidFill>
+              <a:latin typeface="Times New Roman"/>
+              <a:ea typeface="Times New Roman"/>
+              <a:cs typeface="Times New Roman"/>
+              <a:sym typeface="Times New Roman"/>
+            </a:endParaRPr>
+          </a:p>
+        </p:txBody>
+      </p:sp>
+      <p:sp>
+        <p:nvSpPr>
+          <p:cNvPr id="282" name="Google Shape;282;p18">
+            <a:extLst>
+              <a:ext uri="{FF2B5EF4-FFF2-40B4-BE49-F238E27FC236}">
+                <a16:creationId xmlns:a16="http://schemas.microsoft.com/office/drawing/2014/main" id="{F1C3EBC2-438F-C150-9ABF-F14321C2CC5C}"/>
+              </a:ext>
+            </a:extLst>
+          </p:cNvPr>
+          <p:cNvSpPr/>
+          <p:nvPr/>
+        </p:nvSpPr>
+        <p:spPr>
+          <a:xfrm>
+            <a:off x="1218724" y="5430713"/>
+            <a:ext cx="7468553" cy="383024"/>
+          </a:xfrm>
+          <a:prstGeom prst="rect">
+            <a:avLst/>
+          </a:prstGeom>
+          <a:noFill/>
+          <a:ln>
+            <a:noFill/>
+          </a:ln>
+        </p:spPr>
+        <p:txBody>
+          <a:bodyPr spcFirstLastPara="1" wrap="square" lIns="0" tIns="0" rIns="0" bIns="0" anchor="t" anchorCtr="0">
+            <a:noAutofit/>
+          </a:bodyPr>
+          <a:lstStyle/>
+          <a:p>
+            <a:pPr marL="0" marR="0" lvl="0" indent="0" algn="l" rtl="0">
+              <a:lnSpc>
+                <a:spcPct val="162162"/>
+              </a:lnSpc>
+              <a:spcBef>
+                <a:spcPts val="0"/>
+              </a:spcBef>
+              <a:spcAft>
+                <a:spcPts val="0"/>
+              </a:spcAft>
+              <a:buClr>
+                <a:srgbClr val="2B3541"/>
+              </a:buClr>
+              <a:buSzPts val="1850"/>
+              <a:buFont typeface="Times New Roman"/>
+              <a:buNone/>
+            </a:pPr>
+            <a:r>
+              <a:rPr lang="en-US" sz="1850" b="0" i="0" u="none" strike="noStrike" cap="none">
+                <a:solidFill>
+                  <a:srgbClr val="2B3541"/>
+                </a:solidFill>
+                <a:latin typeface="Times New Roman"/>
+                <a:ea typeface="Times New Roman"/>
+                <a:cs typeface="Times New Roman"/>
+                <a:sym typeface="Times New Roman"/>
+              </a:rPr>
+              <a:t>·</a:t>
+            </a:r>
+            <a:endParaRPr sz="1850" b="0" i="0" u="none" strike="noStrike" cap="none">
+              <a:solidFill>
+                <a:srgbClr val="000000"/>
+              </a:solidFill>
+              <a:latin typeface="Times New Roman"/>
+              <a:ea typeface="Times New Roman"/>
+              <a:cs typeface="Times New Roman"/>
+              <a:sym typeface="Times New Roman"/>
+            </a:endParaRPr>
+          </a:p>
+        </p:txBody>
+      </p:sp>
+    </p:spTree>
+    <p:extLst>
+      <p:ext uri="{BB962C8B-B14F-4D97-AF65-F5344CB8AC3E}">
+        <p14:creationId xmlns:p14="http://schemas.microsoft.com/office/powerpoint/2010/main" val="2136706720"/>
+      </p:ext>
+    </p:extLst>
+  </p:cSld>
+  <p:clrMapOvr>
+    <a:masterClrMapping/>
+  </p:clrMapOvr>
+</p:sld>
+</file>
+
+<file path=ppt/slides/slide21.xml><?xml version="1.0" encoding="utf-8"?>
+<p:sld xmlns:a="http://schemas.openxmlformats.org/drawingml/2006/main" xmlns:r="http://schemas.openxmlformats.org/officeDocument/2006/relationships" xmlns:p="http://schemas.openxmlformats.org/presentationml/2006/main">
+  <p:cSld>
+    <p:spTree>
+      <p:nvGrpSpPr>
+        <p:cNvPr id="1" name=""/>
+        <p:cNvGrpSpPr/>
+        <p:nvPr/>
+      </p:nvGrpSpPr>
+      <p:grpSpPr>
+        <a:xfrm>
+          <a:off x="0" y="0"/>
+          <a:ext cx="0" cy="0"/>
+          <a:chOff x="0" y="0"/>
+          <a:chExt cx="0" cy="0"/>
+        </a:xfrm>
+      </p:grpSpPr>
+      <p:sp>
+        <p:nvSpPr>
+          <p:cNvPr id="6" name="TextBox 5">
+            <a:extLst>
+              <a:ext uri="{FF2B5EF4-FFF2-40B4-BE49-F238E27FC236}">
+                <a16:creationId xmlns:a16="http://schemas.microsoft.com/office/drawing/2014/main" id="{3F1C7BCA-5DD7-F4D3-A937-D1C56976DA01}"/>
+              </a:ext>
+            </a:extLst>
+          </p:cNvPr>
+          <p:cNvSpPr txBox="1"/>
+          <p:nvPr/>
+        </p:nvSpPr>
+        <p:spPr>
+          <a:xfrm>
+            <a:off x="327949" y="207380"/>
+            <a:ext cx="6096000" cy="677108"/>
+          </a:xfrm>
+          <a:prstGeom prst="rect">
+            <a:avLst/>
+          </a:prstGeom>
+          <a:noFill/>
+        </p:spPr>
+        <p:txBody>
+          <a:bodyPr rot="0" spcFirstLastPara="0" vertOverflow="overflow" horzOverflow="overflow" vert="horz" wrap="square" lIns="91440" tIns="45720" rIns="91440" bIns="45720" numCol="1" spcCol="0" rtlCol="0" fromWordArt="0" anchor="t" anchorCtr="0" forceAA="0" compatLnSpc="1">
+            <a:prstTxWarp prst="textNoShape">
+              <a:avLst/>
+            </a:prstTxWarp>
+            <a:spAutoFit/>
+          </a:bodyPr>
+          <a:lstStyle/>
+          <a:p>
+            <a:r>
+              <a:rPr lang="en-US" sz="2400" b="1"/>
+              <a:t>Certificates Earned:</a:t>
+            </a:r>
+          </a:p>
+          <a:p>
+            <a:pPr algn="ctr"/>
+            <a:endParaRPr lang="en-US"/>
+          </a:p>
+        </p:txBody>
+      </p:sp>
+      <p:pic>
+        <p:nvPicPr>
+          <p:cNvPr id="4" name="Picture 3">
+            <a:extLst>
+              <a:ext uri="{FF2B5EF4-FFF2-40B4-BE49-F238E27FC236}">
+                <a16:creationId xmlns:a16="http://schemas.microsoft.com/office/drawing/2014/main" id="{A037CFD0-B7FF-D9BE-3433-88E5844EF332}"/>
+              </a:ext>
+            </a:extLst>
+          </p:cNvPr>
+          <p:cNvPicPr>
+            <a:picLocks noChangeAspect="1"/>
+          </p:cNvPicPr>
+          <p:nvPr/>
+        </p:nvPicPr>
+        <p:blipFill>
+          <a:blip r:embed="rId2"/>
+          <a:srcRect/>
+          <a:stretch/>
+        </p:blipFill>
+        <p:spPr>
+          <a:xfrm>
+            <a:off x="2884615" y="1015711"/>
+            <a:ext cx="6422769" cy="4826578"/>
+          </a:xfrm>
+          <a:prstGeom prst="rect">
+            <a:avLst/>
+          </a:prstGeom>
+        </p:spPr>
+      </p:pic>
+    </p:spTree>
+    <p:extLst>
+      <p:ext uri="{BB962C8B-B14F-4D97-AF65-F5344CB8AC3E}">
+        <p14:creationId xmlns:p14="http://schemas.microsoft.com/office/powerpoint/2010/main" val="1229047658"/>
+      </p:ext>
+    </p:extLst>
+  </p:cSld>
+  <p:clrMapOvr>
+    <a:masterClrMapping/>
+  </p:clrMapOvr>
+</p:sld>
+</file>
+
+<file path=ppt/slides/slide22.xml><?xml version="1.0" encoding="utf-8"?>
+<p:sld xmlns:a="http://schemas.openxmlformats.org/drawingml/2006/main" xmlns:r="http://schemas.openxmlformats.org/officeDocument/2006/relationships" xmlns:p="http://schemas.openxmlformats.org/presentationml/2006/main">
+  <p:cSld>
+    <p:spTree>
+      <p:nvGrpSpPr>
+        <p:cNvPr id="1" name=""/>
+        <p:cNvGrpSpPr/>
+        <p:nvPr/>
+      </p:nvGrpSpPr>
+      <p:grpSpPr>
+        <a:xfrm>
+          <a:off x="0" y="0"/>
+          <a:ext cx="0" cy="0"/>
+          <a:chOff x="0" y="0"/>
+          <a:chExt cx="0" cy="0"/>
+        </a:xfrm>
+      </p:grpSpPr>
+      <p:pic>
+        <p:nvPicPr>
+          <p:cNvPr id="4" name="Picture 3">
+            <a:extLst>
+              <a:ext uri="{FF2B5EF4-FFF2-40B4-BE49-F238E27FC236}">
+                <a16:creationId xmlns:a16="http://schemas.microsoft.com/office/drawing/2014/main" id="{099C3698-991D-7A38-C456-893C84C23FC9}"/>
+              </a:ext>
+            </a:extLst>
+          </p:cNvPr>
+          <p:cNvPicPr>
+            <a:picLocks noChangeAspect="1"/>
+          </p:cNvPicPr>
+          <p:nvPr/>
+        </p:nvPicPr>
+        <p:blipFill>
+          <a:blip r:embed="rId2"/>
+          <a:srcRect l="2384" r="2384"/>
+          <a:stretch/>
+        </p:blipFill>
+        <p:spPr>
+          <a:xfrm>
+            <a:off x="2507223" y="1099711"/>
+            <a:ext cx="7177553" cy="4658577"/>
+          </a:xfrm>
+          <a:prstGeom prst="rect">
+            <a:avLst/>
+          </a:prstGeom>
+        </p:spPr>
+      </p:pic>
+      <p:sp>
+        <p:nvSpPr>
+          <p:cNvPr id="5" name="TextBox 4">
+            <a:extLst>
+              <a:ext uri="{FF2B5EF4-FFF2-40B4-BE49-F238E27FC236}">
+                <a16:creationId xmlns:a16="http://schemas.microsoft.com/office/drawing/2014/main" id="{CA8544A9-CF92-3FAF-D3EE-31DF90F7A64D}"/>
+              </a:ext>
+            </a:extLst>
+          </p:cNvPr>
+          <p:cNvSpPr txBox="1"/>
+          <p:nvPr/>
+        </p:nvSpPr>
+        <p:spPr>
+          <a:xfrm>
+            <a:off x="176696" y="226391"/>
+            <a:ext cx="6096000" cy="677108"/>
+          </a:xfrm>
+          <a:prstGeom prst="rect">
+            <a:avLst/>
+          </a:prstGeom>
+          <a:noFill/>
+        </p:spPr>
+        <p:txBody>
+          <a:bodyPr rot="0" spcFirstLastPara="0" vertOverflow="overflow" horzOverflow="overflow" vert="horz" wrap="square" lIns="91440" tIns="45720" rIns="91440" bIns="45720" numCol="1" spcCol="0" rtlCol="0" fromWordArt="0" anchor="t" anchorCtr="0" forceAA="0" compatLnSpc="1">
+            <a:prstTxWarp prst="textNoShape">
+              <a:avLst/>
+            </a:prstTxWarp>
+            <a:spAutoFit/>
+          </a:bodyPr>
+          <a:lstStyle/>
+          <a:p>
+            <a:r>
+              <a:rPr lang="en-US" sz="2400" b="1" i="0" u="none" strike="noStrike" baseline="0">
+                <a:solidFill>
+                  <a:srgbClr val="000000"/>
+                </a:solidFill>
+                <a:latin typeface="Arial"/>
+              </a:rPr>
+              <a:t>Certificates Earned:</a:t>
+            </a:r>
+            <a:r>
+              <a:rPr sz="2400" b="0" i="0">
+                <a:solidFill>
+                  <a:srgbClr val="000000"/>
+                </a:solidFill>
+                <a:latin typeface="Arial"/>
+                <a:ea typeface="Arial"/>
+                <a:cs typeface="Arial"/>
+              </a:rPr>
+              <a:t>​</a:t>
+            </a:r>
+            <a:endParaRPr lang="en-US"/>
+          </a:p>
+          <a:p>
+            <a:pPr algn="ctr"/>
+            <a:endParaRPr lang="en-US"/>
+          </a:p>
+        </p:txBody>
+      </p:sp>
+    </p:spTree>
+    <p:extLst>
+      <p:ext uri="{BB962C8B-B14F-4D97-AF65-F5344CB8AC3E}">
+        <p14:creationId xmlns:p14="http://schemas.microsoft.com/office/powerpoint/2010/main" val="2506610743"/>
+      </p:ext>
+    </p:extLst>
+  </p:cSld>
+  <p:clrMapOvr>
+    <a:masterClrMapping/>
+  </p:clrMapOvr>
+</p:sld>
+</file>
+
+<file path=ppt/slides/slide23.xml><?xml version="1.0" encoding="utf-8"?>
+<p:sld xmlns:a="http://schemas.openxmlformats.org/drawingml/2006/main" xmlns:r="http://schemas.openxmlformats.org/officeDocument/2006/relationships" xmlns:p="http://schemas.openxmlformats.org/presentationml/2006/main">
+  <p:cSld>
+    <p:spTree>
+      <p:nvGrpSpPr>
+        <p:cNvPr id="1" name="">
+          <a:extLst>
+            <a:ext uri="{FF2B5EF4-FFF2-40B4-BE49-F238E27FC236}">
+              <a16:creationId xmlns:a16="http://schemas.microsoft.com/office/drawing/2014/main" id="{C7FEA648-E348-25FB-4911-6930DE82F0AA}"/>
+            </a:ext>
+          </a:extLst>
+        </p:cNvPr>
+        <p:cNvGrpSpPr/>
+        <p:nvPr/>
+      </p:nvGrpSpPr>
+      <p:grpSpPr>
+        <a:xfrm>
+          <a:off x="0" y="0"/>
+          <a:ext cx="0" cy="0"/>
+          <a:chOff x="0" y="0"/>
+          <a:chExt cx="0" cy="0"/>
+        </a:xfrm>
+      </p:grpSpPr>
+      <p:sp>
+        <p:nvSpPr>
+          <p:cNvPr id="5" name="TextBox 4">
+            <a:extLst>
+              <a:ext uri="{FF2B5EF4-FFF2-40B4-BE49-F238E27FC236}">
+                <a16:creationId xmlns:a16="http://schemas.microsoft.com/office/drawing/2014/main" id="{0BBBA48A-CE54-AE82-07BE-1BE6CCB42276}"/>
+              </a:ext>
+            </a:extLst>
+          </p:cNvPr>
+          <p:cNvSpPr txBox="1"/>
+          <p:nvPr/>
+        </p:nvSpPr>
+        <p:spPr>
+          <a:xfrm>
+            <a:off x="176696" y="226391"/>
+            <a:ext cx="6096000" cy="677108"/>
+          </a:xfrm>
+          <a:prstGeom prst="rect">
+            <a:avLst/>
+          </a:prstGeom>
+          <a:noFill/>
+        </p:spPr>
+        <p:txBody>
+          <a:bodyPr rot="0" spcFirstLastPara="0" vertOverflow="overflow" horzOverflow="overflow" vert="horz" wrap="square" lIns="91440" tIns="45720" rIns="91440" bIns="45720" numCol="1" spcCol="0" rtlCol="0" fromWordArt="0" anchor="t" anchorCtr="0" forceAA="0" compatLnSpc="1">
+            <a:prstTxWarp prst="textNoShape">
+              <a:avLst/>
+            </a:prstTxWarp>
+            <a:spAutoFit/>
+          </a:bodyPr>
+          <a:lstStyle/>
+          <a:p>
+            <a:r>
+              <a:rPr lang="en-US" sz="2400" b="1" i="0" u="none" strike="noStrike" baseline="0">
+                <a:solidFill>
+                  <a:srgbClr val="000000"/>
+                </a:solidFill>
+                <a:latin typeface="Arial"/>
+              </a:rPr>
+              <a:t>Certificates Earned:</a:t>
+            </a:r>
+            <a:r>
+              <a:rPr sz="2400" b="0" i="0">
+                <a:solidFill>
+                  <a:srgbClr val="000000"/>
+                </a:solidFill>
+                <a:latin typeface="Arial"/>
+                <a:ea typeface="Arial"/>
+                <a:cs typeface="Arial"/>
+              </a:rPr>
+              <a:t>​</a:t>
+            </a:r>
+            <a:endParaRPr lang="en-US"/>
+          </a:p>
+          <a:p>
+            <a:pPr algn="ctr"/>
+            <a:endParaRPr lang="en-US"/>
+          </a:p>
+        </p:txBody>
+      </p:sp>
+      <p:pic>
+        <p:nvPicPr>
+          <p:cNvPr id="3" name="Picture 2">
+            <a:extLst>
+              <a:ext uri="{FF2B5EF4-FFF2-40B4-BE49-F238E27FC236}">
+                <a16:creationId xmlns:a16="http://schemas.microsoft.com/office/drawing/2014/main" id="{56AAA3EA-D917-70C4-40CC-12D18A61905B}"/>
+              </a:ext>
+            </a:extLst>
+          </p:cNvPr>
+          <p:cNvPicPr>
+            <a:picLocks noChangeAspect="1"/>
+          </p:cNvPicPr>
+          <p:nvPr/>
+        </p:nvPicPr>
+        <p:blipFill>
+          <a:blip r:embed="rId2"/>
+          <a:stretch>
+            <a:fillRect/>
+          </a:stretch>
+        </p:blipFill>
+        <p:spPr>
+          <a:xfrm>
+            <a:off x="2745704" y="770328"/>
+            <a:ext cx="7053984" cy="5317343"/>
+          </a:xfrm>
+          <a:prstGeom prst="rect">
+            <a:avLst/>
+          </a:prstGeom>
+        </p:spPr>
+      </p:pic>
+    </p:spTree>
+    <p:extLst>
+      <p:ext uri="{BB962C8B-B14F-4D97-AF65-F5344CB8AC3E}">
+        <p14:creationId xmlns:p14="http://schemas.microsoft.com/office/powerpoint/2010/main" val="2508761264"/>
+      </p:ext>
+    </p:extLst>
+  </p:cSld>
+  <p:clrMapOvr>
+    <a:masterClrMapping/>
+  </p:clrMapOvr>
+</p:sld>
+</file>
+
+<file path=ppt/slides/slide24.xml><?xml version="1.0" encoding="utf-8"?>
+<p:sld xmlns:a="http://schemas.openxmlformats.org/drawingml/2006/main" xmlns:r="http://schemas.openxmlformats.org/officeDocument/2006/relationships" xmlns:p="http://schemas.openxmlformats.org/presentationml/2006/main">
+  <p:cSld>
+    <p:spTree>
+      <p:nvGrpSpPr>
+        <p:cNvPr id="1" name="">
+          <a:extLst>
+            <a:ext uri="{FF2B5EF4-FFF2-40B4-BE49-F238E27FC236}">
+              <a16:creationId xmlns:a16="http://schemas.microsoft.com/office/drawing/2014/main" id="{CE708814-485A-38D3-57CB-544823340EE3}"/>
+            </a:ext>
+          </a:extLst>
+        </p:cNvPr>
+        <p:cNvGrpSpPr/>
+        <p:nvPr/>
+      </p:nvGrpSpPr>
+      <p:grpSpPr>
+        <a:xfrm>
+          <a:off x="0" y="0"/>
+          <a:ext cx="0" cy="0"/>
+          <a:chOff x="0" y="0"/>
+          <a:chExt cx="0" cy="0"/>
+        </a:xfrm>
+      </p:grpSpPr>
+      <p:sp>
+        <p:nvSpPr>
+          <p:cNvPr id="5" name="TextBox 4">
+            <a:extLst>
+              <a:ext uri="{FF2B5EF4-FFF2-40B4-BE49-F238E27FC236}">
+                <a16:creationId xmlns:a16="http://schemas.microsoft.com/office/drawing/2014/main" id="{37215C4F-13A1-DF61-AB58-8A58008E64D1}"/>
+              </a:ext>
+            </a:extLst>
+          </p:cNvPr>
+          <p:cNvSpPr txBox="1"/>
+          <p:nvPr/>
+        </p:nvSpPr>
+        <p:spPr>
+          <a:xfrm>
+            <a:off x="262421" y="426416"/>
+            <a:ext cx="2528404" cy="307777"/>
+          </a:xfrm>
+          <a:prstGeom prst="rect">
+            <a:avLst/>
+          </a:prstGeom>
+          <a:noFill/>
+        </p:spPr>
+        <p:txBody>
+          <a:bodyPr rot="0" spcFirstLastPara="0" vertOverflow="overflow" horzOverflow="overflow" vert="horz" wrap="square" lIns="91440" tIns="45720" rIns="91440" bIns="45720" numCol="1" spcCol="0" rtlCol="0" fromWordArt="0" anchor="t" anchorCtr="0" forceAA="0" compatLnSpc="1">
+            <a:prstTxWarp prst="textNoShape">
+              <a:avLst/>
+            </a:prstTxWarp>
+            <a:spAutoFit/>
+          </a:bodyPr>
+          <a:lstStyle/>
+          <a:p>
+            <a:pPr algn="ctr"/>
+            <a:r>
+              <a:rPr lang="en-US" b="1" dirty="0"/>
+              <a:t>STUDENT DETAILS:</a:t>
+            </a:r>
+          </a:p>
+        </p:txBody>
+      </p:sp>
+      <p:sp>
+        <p:nvSpPr>
+          <p:cNvPr id="2" name="TextBox 1">
+            <a:extLst>
+              <a:ext uri="{FF2B5EF4-FFF2-40B4-BE49-F238E27FC236}">
+                <a16:creationId xmlns:a16="http://schemas.microsoft.com/office/drawing/2014/main" id="{6A642E45-0FFA-F804-1BBD-397FA9C04C4F}"/>
+              </a:ext>
+            </a:extLst>
+          </p:cNvPr>
+          <p:cNvSpPr txBox="1"/>
+          <p:nvPr/>
+        </p:nvSpPr>
+        <p:spPr>
+          <a:xfrm>
+            <a:off x="981075" y="1266825"/>
+            <a:ext cx="7019925" cy="1169551"/>
+          </a:xfrm>
+          <a:prstGeom prst="rect">
+            <a:avLst/>
+          </a:prstGeom>
+          <a:noFill/>
+        </p:spPr>
+        <p:txBody>
+          <a:bodyPr wrap="square" rtlCol="0">
+            <a:spAutoFit/>
+          </a:bodyPr>
+          <a:lstStyle/>
+          <a:p>
+            <a:r>
+              <a:rPr lang="en-US" dirty="0"/>
+              <a:t>Name : Shubhamkumar Patil</a:t>
+            </a:r>
+          </a:p>
+          <a:p>
+            <a:r>
+              <a:rPr lang="en-US" dirty="0"/>
+              <a:t>Email : </a:t>
+            </a:r>
+            <a:r>
+              <a:rPr lang="en-US" dirty="0">
+                <a:hlinkClick r:id="rId2"/>
+              </a:rPr>
+              <a:t>shubham20387@gmail.com</a:t>
+            </a:r>
+            <a:endParaRPr lang="en-US" dirty="0"/>
+          </a:p>
+          <a:p>
+            <a:r>
+              <a:rPr lang="en-US" dirty="0"/>
+              <a:t>PRN : 202501080224</a:t>
+            </a:r>
+          </a:p>
+          <a:p>
+            <a:endParaRPr lang="en-US" dirty="0"/>
+          </a:p>
+          <a:p>
+            <a:r>
+              <a:rPr lang="en-US" dirty="0"/>
+              <a:t>AICTE ID : </a:t>
+            </a:r>
+            <a:r>
+              <a:rPr lang="en-IN" dirty="0"/>
+              <a:t>STU6a1556780481d1779783288</a:t>
+            </a:r>
+          </a:p>
+        </p:txBody>
+      </p:sp>
+    </p:spTree>
+    <p:extLst>
+      <p:ext uri="{BB962C8B-B14F-4D97-AF65-F5344CB8AC3E}">
+        <p14:creationId xmlns:p14="http://schemas.microsoft.com/office/powerpoint/2010/main" val="455251285"/>
+      </p:ext>
+    </p:extLst>
+  </p:cSld>
+  <p:clrMapOvr>
+    <a:masterClrMapping/>
+  </p:clrMapOvr>
+</p:sld>
+</file>
+
+<file path=ppt/slides/slide25.xml><?xml version="1.0" encoding="utf-8"?>
+<p:sld xmlns:a="http://schemas.openxmlformats.org/drawingml/2006/main" xmlns:r="http://schemas.openxmlformats.org/officeDocument/2006/relationships" xmlns:p="http://schemas.openxmlformats.org/presentationml/2006/main">
+  <p:cSld>
+    <p:spTree>
+      <p:nvGrpSpPr>
+        <p:cNvPr id="1" name="Shape 306"/>
+        <p:cNvGrpSpPr/>
+        <p:nvPr/>
+      </p:nvGrpSpPr>
+      <p:grpSpPr>
+        <a:xfrm>
+          <a:off x="0" y="0"/>
+          <a:ext cx="0" cy="0"/>
+          <a:chOff x="0" y="0"/>
+          <a:chExt cx="0" cy="0"/>
+        </a:xfrm>
+      </p:grpSpPr>
+      <p:pic>
+        <p:nvPicPr>
+          <p:cNvPr id="310" name="Google Shape;310;p20"/>
+          <p:cNvPicPr preferRelativeResize="0"/>
+          <p:nvPr/>
+        </p:nvPicPr>
+        <p:blipFill rotWithShape="1">
+          <a:blip r:embed="rId3">
+            <a:alphaModFix/>
+          </a:blip>
+          <a:srcRect/>
+          <a:stretch/>
+        </p:blipFill>
+        <p:spPr>
+          <a:xfrm>
+            <a:off x="0" y="2190302"/>
+            <a:ext cx="12192000" cy="2477396"/>
+          </a:xfrm>
+          <a:prstGeom prst="rect">
+            <a:avLst/>
+          </a:prstGeom>
+          <a:noFill/>
+          <a:ln>
+            <a:noFill/>
+          </a:ln>
+        </p:spPr>
+      </p:pic>
+    </p:spTree>
+  </p:cSld>
+  <p:clrMapOvr>
+    <a:masterClrMapping/>
+  </p:clrMapOvr>
+</p:sld>
+</file>
+
 <file path=ppt/slides/slide3.xml><?xml version="1.0" encoding="utf-8"?>
 <p:sld xmlns:a="http://schemas.openxmlformats.org/drawingml/2006/main" xmlns:r="http://schemas.openxmlformats.org/officeDocument/2006/relationships" xmlns:p="http://schemas.openxmlformats.org/presentationml/2006/main">
   <p:cSld>
@@ -14639,7 +15736,7 @@
         <p:spPr>
           <a:xfrm>
             <a:off x="777240" y="1207008"/>
-            <a:ext cx="10515600" cy="3016210"/>
+            <a:ext cx="10515600" cy="3570208"/>
           </a:xfrm>
           <a:prstGeom prst="rect">
             <a:avLst/>
@@ -14732,6 +15829,23 @@
               <a:rPr lang="en-US" sz="1800" dirty="0"/>
               <a:t>HPO-1, FE, HPO-2, BATCH</a:t>
             </a:r>
+          </a:p>
+          <a:p>
+            <a:pPr marL="285750" indent="-285750">
+              <a:buFont typeface="Arial" panose="020B0604020202020204" pitchFamily="34" charset="0"/>
+              <a:buChar char="•"/>
+            </a:pPr>
+            <a:r>
+              <a:rPr lang="en-US" sz="1800" b="1" dirty="0"/>
+              <a:t>IBM BOB : </a:t>
+            </a:r>
+            <a:r>
+              <a:rPr lang="en-US" sz="1800" dirty="0"/>
+              <a:t>To create front end, back end and used API keys for deployment</a:t>
+            </a:r>
+          </a:p>
+          <a:p>
+            <a:endParaRPr lang="en-US" sz="1800" dirty="0"/>
           </a:p>
           <a:p>
             <a:pPr marL="285750" indent="-285750">
